--- a/exam-generator/sp025-exam-generator/c2/files.pptx
+++ b/exam-generator/sp025-exam-generator/c2/files.pptx
@@ -5,12 +5,18 @@
     <p:sldMasterId id="2147483648" r:id="rId1"/>
   </p:sldMasterIdLst>
   <p:notesMasterIdLst>
-    <p:notesMasterId r:id="rId5"/>
+    <p:notesMasterId r:id="rId11"/>
   </p:notesMasterIdLst>
   <p:sldIdLst>
     <p:sldId id="256" r:id="rId2"/>
     <p:sldId id="257" r:id="rId3"/>
     <p:sldId id="258" r:id="rId4"/>
+    <p:sldId id="259" r:id="rId5"/>
+    <p:sldId id="260" r:id="rId6"/>
+    <p:sldId id="261" r:id="rId7"/>
+    <p:sldId id="262" r:id="rId8"/>
+    <p:sldId id="263" r:id="rId9"/>
+    <p:sldId id="264" r:id="rId10"/>
   </p:sldIdLst>
   <p:sldSz cx="12192000" cy="6858000"/>
   <p:notesSz cx="6858000" cy="9144000"/>
@@ -109,6 +115,11 @@
       </a:defRPr>
     </a:lvl9pPr>
   </p:defaultTextStyle>
+  <p:extLst>
+    <p:ext uri="{EFAFB233-063F-42B5-8137-9DF3F51BA10A}">
+      <p15:sldGuideLst xmlns:p15="http://schemas.microsoft.com/office/powerpoint/2012/main"/>
+    </p:ext>
+  </p:extLst>
 </p:presentation>
 </file>
 
@@ -194,7 +205,7 @@
           <a:p>
             <a:fld id="{E930CEF5-4124-458A-8583-FB2A0D68282E}" type="datetimeFigureOut">
               <a:rPr lang="en-MY" smtClean="0"/>
-              <a:t>16/3/2026</a:t>
+              <a:t>16/4/2026</a:t>
             </a:fld>
             <a:endParaRPr lang="en-MY"/>
           </a:p>
@@ -698,7 +709,7 @@
           <a:p>
             <a:fld id="{55736931-D21D-4CEE-8596-8652B0B9C773}" type="datetimeFigureOut">
               <a:rPr lang="en-MY" smtClean="0"/>
-              <a:t>16/3/2026</a:t>
+              <a:t>16/4/2026</a:t>
             </a:fld>
             <a:endParaRPr lang="en-MY"/>
           </a:p>
@@ -898,7 +909,7 @@
           <a:p>
             <a:fld id="{55736931-D21D-4CEE-8596-8652B0B9C773}" type="datetimeFigureOut">
               <a:rPr lang="en-MY" smtClean="0"/>
-              <a:t>16/3/2026</a:t>
+              <a:t>16/4/2026</a:t>
             </a:fld>
             <a:endParaRPr lang="en-MY"/>
           </a:p>
@@ -1108,7 +1119,7 @@
           <a:p>
             <a:fld id="{55736931-D21D-4CEE-8596-8652B0B9C773}" type="datetimeFigureOut">
               <a:rPr lang="en-MY" smtClean="0"/>
-              <a:t>16/3/2026</a:t>
+              <a:t>16/4/2026</a:t>
             </a:fld>
             <a:endParaRPr lang="en-MY"/>
           </a:p>
@@ -1308,7 +1319,7 @@
           <a:p>
             <a:fld id="{55736931-D21D-4CEE-8596-8652B0B9C773}" type="datetimeFigureOut">
               <a:rPr lang="en-MY" smtClean="0"/>
-              <a:t>16/3/2026</a:t>
+              <a:t>16/4/2026</a:t>
             </a:fld>
             <a:endParaRPr lang="en-MY"/>
           </a:p>
@@ -1584,7 +1595,7 @@
           <a:p>
             <a:fld id="{55736931-D21D-4CEE-8596-8652B0B9C773}" type="datetimeFigureOut">
               <a:rPr lang="en-MY" smtClean="0"/>
-              <a:t>16/3/2026</a:t>
+              <a:t>16/4/2026</a:t>
             </a:fld>
             <a:endParaRPr lang="en-MY"/>
           </a:p>
@@ -1852,7 +1863,7 @@
           <a:p>
             <a:fld id="{55736931-D21D-4CEE-8596-8652B0B9C773}" type="datetimeFigureOut">
               <a:rPr lang="en-MY" smtClean="0"/>
-              <a:t>16/3/2026</a:t>
+              <a:t>16/4/2026</a:t>
             </a:fld>
             <a:endParaRPr lang="en-MY"/>
           </a:p>
@@ -2267,7 +2278,7 @@
           <a:p>
             <a:fld id="{55736931-D21D-4CEE-8596-8652B0B9C773}" type="datetimeFigureOut">
               <a:rPr lang="en-MY" smtClean="0"/>
-              <a:t>16/3/2026</a:t>
+              <a:t>16/4/2026</a:t>
             </a:fld>
             <a:endParaRPr lang="en-MY"/>
           </a:p>
@@ -2409,7 +2420,7 @@
           <a:p>
             <a:fld id="{55736931-D21D-4CEE-8596-8652B0B9C773}" type="datetimeFigureOut">
               <a:rPr lang="en-MY" smtClean="0"/>
-              <a:t>16/3/2026</a:t>
+              <a:t>16/4/2026</a:t>
             </a:fld>
             <a:endParaRPr lang="en-MY"/>
           </a:p>
@@ -2522,7 +2533,7 @@
           <a:p>
             <a:fld id="{55736931-D21D-4CEE-8596-8652B0B9C773}" type="datetimeFigureOut">
               <a:rPr lang="en-MY" smtClean="0"/>
-              <a:t>16/3/2026</a:t>
+              <a:t>16/4/2026</a:t>
             </a:fld>
             <a:endParaRPr lang="en-MY"/>
           </a:p>
@@ -2835,7 +2846,7 @@
           <a:p>
             <a:fld id="{55736931-D21D-4CEE-8596-8652B0B9C773}" type="datetimeFigureOut">
               <a:rPr lang="en-MY" smtClean="0"/>
-              <a:t>16/3/2026</a:t>
+              <a:t>16/4/2026</a:t>
             </a:fld>
             <a:endParaRPr lang="en-MY"/>
           </a:p>
@@ -3124,7 +3135,7 @@
           <a:p>
             <a:fld id="{55736931-D21D-4CEE-8596-8652B0B9C773}" type="datetimeFigureOut">
               <a:rPr lang="en-MY" smtClean="0"/>
-              <a:t>16/3/2026</a:t>
+              <a:t>16/4/2026</a:t>
             </a:fld>
             <a:endParaRPr lang="en-MY"/>
           </a:p>
@@ -3367,7 +3378,7 @@
           <a:p>
             <a:fld id="{55736931-D21D-4CEE-8596-8652B0B9C773}" type="datetimeFigureOut">
               <a:rPr lang="en-MY" smtClean="0"/>
-              <a:t>16/3/2026</a:t>
+              <a:t>16/4/2026</a:t>
             </a:fld>
             <a:endParaRPr lang="en-MY"/>
           </a:p>
@@ -4057,6 +4068,3835 @@
     <p:extLst>
       <p:ext uri="{BB962C8B-B14F-4D97-AF65-F5344CB8AC3E}">
         <p14:creationId xmlns:p14="http://schemas.microsoft.com/office/powerpoint/2010/main" val="3626659991"/>
+      </p:ext>
+    </p:extLst>
+  </p:cSld>
+  <p:clrMapOvr>
+    <a:masterClrMapping/>
+  </p:clrMapOvr>
+</p:sld>
+</file>
+
+<file path=ppt/slides/slide4.xml><?xml version="1.0" encoding="utf-8"?>
+<p:sld xmlns:a="http://schemas.openxmlformats.org/drawingml/2006/main" xmlns:r="http://schemas.openxmlformats.org/officeDocument/2006/relationships" xmlns:p="http://schemas.openxmlformats.org/presentationml/2006/main">
+  <p:cSld>
+    <p:spTree>
+      <p:nvGrpSpPr>
+        <p:cNvPr id="1" name=""/>
+        <p:cNvGrpSpPr/>
+        <p:nvPr/>
+      </p:nvGrpSpPr>
+      <p:grpSpPr>
+        <a:xfrm>
+          <a:off x="0" y="0"/>
+          <a:ext cx="0" cy="0"/>
+          <a:chOff x="0" y="0"/>
+          <a:chExt cx="0" cy="0"/>
+        </a:xfrm>
+      </p:grpSpPr>
+      <p:pic>
+        <p:nvPicPr>
+          <p:cNvPr id="3" name="Picture 2">
+            <a:extLst>
+              <a:ext uri="{FF2B5EF4-FFF2-40B4-BE49-F238E27FC236}">
+                <a16:creationId xmlns:a16="http://schemas.microsoft.com/office/drawing/2014/main" id="{43FB63BB-3483-D7A5-5325-F8F5DBFE447C}"/>
+              </a:ext>
+            </a:extLst>
+          </p:cNvPr>
+          <p:cNvPicPr>
+            <a:picLocks noChangeAspect="1"/>
+          </p:cNvPicPr>
+          <p:nvPr/>
+        </p:nvPicPr>
+        <p:blipFill>
+          <a:blip r:embed="rId2"/>
+          <a:stretch>
+            <a:fillRect/>
+          </a:stretch>
+        </p:blipFill>
+        <p:spPr>
+          <a:xfrm>
+            <a:off x="4162155" y="471415"/>
+            <a:ext cx="3867690" cy="1038370"/>
+          </a:xfrm>
+          <a:prstGeom prst="rect">
+            <a:avLst/>
+          </a:prstGeom>
+        </p:spPr>
+      </p:pic>
+      <p:sp>
+        <p:nvSpPr>
+          <p:cNvPr id="5" name="TextBox 4">
+            <a:extLst>
+              <a:ext uri="{FF2B5EF4-FFF2-40B4-BE49-F238E27FC236}">
+                <a16:creationId xmlns:a16="http://schemas.microsoft.com/office/drawing/2014/main" id="{D1404303-2F0C-A262-871B-D8D03F4E8910}"/>
+              </a:ext>
+            </a:extLst>
+          </p:cNvPr>
+          <p:cNvSpPr txBox="1"/>
+          <p:nvPr/>
+        </p:nvSpPr>
+        <p:spPr>
+          <a:xfrm>
+            <a:off x="1126570" y="2015840"/>
+            <a:ext cx="10327493" cy="2031325"/>
+          </a:xfrm>
+          <a:prstGeom prst="rect">
+            <a:avLst/>
+          </a:prstGeom>
+          <a:noFill/>
+        </p:spPr>
+        <p:txBody>
+          <a:bodyPr wrap="square">
+            <a:spAutoFit/>
+          </a:bodyPr>
+          <a:lstStyle/>
+          <a:p>
+            <a:pPr>
+              <a:buNone/>
+            </a:pPr>
+            <a:r>
+              <a:rPr lang="en-US" dirty="0">
+                <a:latin typeface="Times New Roman" panose="02020603050405020304" pitchFamily="18" charset="0"/>
+                <a:cs typeface="Times New Roman" panose="02020603050405020304" pitchFamily="18" charset="0"/>
+              </a:rPr>
+              <a:t>2. FIGURE 2 shows three capacitors C₁, C₂, and C₃, each 12 </a:t>
+            </a:r>
+            <a:r>
+              <a:rPr lang="en-US" dirty="0" err="1">
+                <a:latin typeface="Times New Roman" panose="02020603050405020304" pitchFamily="18" charset="0"/>
+                <a:cs typeface="Times New Roman" panose="02020603050405020304" pitchFamily="18" charset="0"/>
+              </a:rPr>
+              <a:t>μF</a:t>
+            </a:r>
+            <a:r>
+              <a:rPr lang="en-US" dirty="0">
+                <a:latin typeface="Times New Roman" panose="02020603050405020304" pitchFamily="18" charset="0"/>
+                <a:cs typeface="Times New Roman" panose="02020603050405020304" pitchFamily="18" charset="0"/>
+              </a:rPr>
+              <a:t>, connected between points A and B.</a:t>
+            </a:r>
+          </a:p>
+          <a:p>
+            <a:pPr>
+              <a:buNone/>
+            </a:pPr>
+            <a:endParaRPr lang="en-US" dirty="0">
+              <a:latin typeface="Times New Roman" panose="02020603050405020304" pitchFamily="18" charset="0"/>
+              <a:cs typeface="Times New Roman" panose="02020603050405020304" pitchFamily="18" charset="0"/>
+            </a:endParaRPr>
+          </a:p>
+          <a:p>
+            <a:pPr>
+              <a:buNone/>
+            </a:pPr>
+            <a:r>
+              <a:rPr lang="en-US" dirty="0">
+                <a:latin typeface="Times New Roman" panose="02020603050405020304" pitchFamily="18" charset="0"/>
+                <a:cs typeface="Times New Roman" panose="02020603050405020304" pitchFamily="18" charset="0"/>
+              </a:rPr>
+              <a:t>a) Calculate the effective capacitance.</a:t>
+            </a:r>
+          </a:p>
+          <a:p>
+            <a:pPr>
+              <a:buNone/>
+            </a:pPr>
+            <a:r>
+              <a:rPr lang="en-US" dirty="0">
+                <a:latin typeface="Times New Roman" panose="02020603050405020304" pitchFamily="18" charset="0"/>
+                <a:cs typeface="Times New Roman" panose="02020603050405020304" pitchFamily="18" charset="0"/>
+              </a:rPr>
+              <a:t>b) If the potential difference across AB is 9 V, calculate:</a:t>
+            </a:r>
+          </a:p>
+          <a:p>
+            <a:pPr>
+              <a:buNone/>
+            </a:pPr>
+            <a:r>
+              <a:rPr lang="en-US" dirty="0">
+                <a:latin typeface="Times New Roman" panose="02020603050405020304" pitchFamily="18" charset="0"/>
+                <a:cs typeface="Times New Roman" panose="02020603050405020304" pitchFamily="18" charset="0"/>
+              </a:rPr>
+              <a:t> </a:t>
+            </a:r>
+            <a:r>
+              <a:rPr lang="en-US" dirty="0" err="1">
+                <a:latin typeface="Times New Roman" panose="02020603050405020304" pitchFamily="18" charset="0"/>
+                <a:cs typeface="Times New Roman" panose="02020603050405020304" pitchFamily="18" charset="0"/>
+              </a:rPr>
+              <a:t>i</a:t>
+            </a:r>
+            <a:r>
+              <a:rPr lang="en-US" dirty="0">
+                <a:latin typeface="Times New Roman" panose="02020603050405020304" pitchFamily="18" charset="0"/>
+                <a:cs typeface="Times New Roman" panose="02020603050405020304" pitchFamily="18" charset="0"/>
+              </a:rPr>
+              <a:t>) charge on C₂ </a:t>
+            </a:r>
+          </a:p>
+          <a:p>
+            <a:pPr>
+              <a:buNone/>
+            </a:pPr>
+            <a:r>
+              <a:rPr lang="en-US" dirty="0">
+                <a:latin typeface="Times New Roman" panose="02020603050405020304" pitchFamily="18" charset="0"/>
+                <a:cs typeface="Times New Roman" panose="02020603050405020304" pitchFamily="18" charset="0"/>
+              </a:rPr>
+              <a:t>ii) total energy stored</a:t>
+            </a:r>
+          </a:p>
+          <a:p>
+            <a:pPr algn="r">
+              <a:buNone/>
+            </a:pPr>
+            <a:r>
+              <a:rPr lang="en-US" dirty="0">
+                <a:latin typeface="Times New Roman" panose="02020603050405020304" pitchFamily="18" charset="0"/>
+                <a:cs typeface="Times New Roman" panose="02020603050405020304" pitchFamily="18" charset="0"/>
+              </a:rPr>
+              <a:t>[7 marks]</a:t>
+            </a:r>
+          </a:p>
+        </p:txBody>
+      </p:sp>
+      <p:pic>
+        <p:nvPicPr>
+          <p:cNvPr id="7" name="Picture 6">
+            <a:extLst>
+              <a:ext uri="{FF2B5EF4-FFF2-40B4-BE49-F238E27FC236}">
+                <a16:creationId xmlns:a16="http://schemas.microsoft.com/office/drawing/2014/main" id="{B65852D9-78EB-EE4F-2693-B886A9B81823}"/>
+              </a:ext>
+            </a:extLst>
+          </p:cNvPr>
+          <p:cNvPicPr>
+            <a:picLocks noChangeAspect="1"/>
+          </p:cNvPicPr>
+          <p:nvPr/>
+        </p:nvPicPr>
+        <p:blipFill>
+          <a:blip r:embed="rId3"/>
+          <a:stretch>
+            <a:fillRect/>
+          </a:stretch>
+        </p:blipFill>
+        <p:spPr>
+          <a:xfrm>
+            <a:off x="7276414" y="5880883"/>
+            <a:ext cx="4915586" cy="743054"/>
+          </a:xfrm>
+          <a:prstGeom prst="rect">
+            <a:avLst/>
+          </a:prstGeom>
+        </p:spPr>
+      </p:pic>
+    </p:spTree>
+    <p:extLst>
+      <p:ext uri="{BB962C8B-B14F-4D97-AF65-F5344CB8AC3E}">
+        <p14:creationId xmlns:p14="http://schemas.microsoft.com/office/powerpoint/2010/main" val="1811014640"/>
+      </p:ext>
+    </p:extLst>
+  </p:cSld>
+  <p:clrMapOvr>
+    <a:masterClrMapping/>
+  </p:clrMapOvr>
+</p:sld>
+</file>
+
+<file path=ppt/slides/slide5.xml><?xml version="1.0" encoding="utf-8"?>
+<p:sld xmlns:a="http://schemas.openxmlformats.org/drawingml/2006/main" xmlns:r="http://schemas.openxmlformats.org/officeDocument/2006/relationships" xmlns:p="http://schemas.openxmlformats.org/presentationml/2006/main">
+  <p:cSld>
+    <p:spTree>
+      <p:nvGrpSpPr>
+        <p:cNvPr id="1" name="">
+          <a:extLst>
+            <a:ext uri="{FF2B5EF4-FFF2-40B4-BE49-F238E27FC236}">
+              <a16:creationId xmlns:a16="http://schemas.microsoft.com/office/drawing/2014/main" id="{29CFA5BC-B3B1-66F2-5E2E-2A4D3777D5FC}"/>
+            </a:ext>
+          </a:extLst>
+        </p:cNvPr>
+        <p:cNvGrpSpPr/>
+        <p:nvPr/>
+      </p:nvGrpSpPr>
+      <p:grpSpPr>
+        <a:xfrm>
+          <a:off x="0" y="0"/>
+          <a:ext cx="0" cy="0"/>
+          <a:chOff x="0" y="0"/>
+          <a:chExt cx="0" cy="0"/>
+        </a:xfrm>
+      </p:grpSpPr>
+      <p:sp>
+        <p:nvSpPr>
+          <p:cNvPr id="3" name="TextBox 2">
+            <a:extLst>
+              <a:ext uri="{FF2B5EF4-FFF2-40B4-BE49-F238E27FC236}">
+                <a16:creationId xmlns:a16="http://schemas.microsoft.com/office/drawing/2014/main" id="{54251881-0673-F343-7F01-A1C14926C790}"/>
+              </a:ext>
+            </a:extLst>
+          </p:cNvPr>
+          <p:cNvSpPr txBox="1"/>
+          <p:nvPr/>
+        </p:nvSpPr>
+        <p:spPr>
+          <a:xfrm>
+            <a:off x="819150" y="597809"/>
+            <a:ext cx="10553700" cy="1477328"/>
+          </a:xfrm>
+          <a:prstGeom prst="rect">
+            <a:avLst/>
+          </a:prstGeom>
+          <a:noFill/>
+        </p:spPr>
+        <p:txBody>
+          <a:bodyPr wrap="square">
+            <a:spAutoFit/>
+          </a:bodyPr>
+          <a:lstStyle/>
+          <a:p>
+            <a:r>
+              <a:rPr lang="en-US" b="1" dirty="0">
+                <a:latin typeface="Times New Roman" panose="02020603050405020304" pitchFamily="18" charset="0"/>
+                <a:cs typeface="Times New Roman" panose="02020603050405020304" pitchFamily="18" charset="0"/>
+              </a:rPr>
+              <a:t>2. a)</a:t>
+            </a:r>
+            <a:r>
+              <a:rPr lang="en-US" dirty="0">
+                <a:latin typeface="Times New Roman" panose="02020603050405020304" pitchFamily="18" charset="0"/>
+                <a:cs typeface="Times New Roman" panose="02020603050405020304" pitchFamily="18" charset="0"/>
+              </a:rPr>
+              <a:t> A 20 </a:t>
+            </a:r>
+            <a:r>
+              <a:rPr lang="en-US" dirty="0" err="1">
+                <a:latin typeface="Times New Roman" panose="02020603050405020304" pitchFamily="18" charset="0"/>
+                <a:cs typeface="Times New Roman" panose="02020603050405020304" pitchFamily="18" charset="0"/>
+              </a:rPr>
+              <a:t>μF</a:t>
+            </a:r>
+            <a:r>
+              <a:rPr lang="en-US" dirty="0">
+                <a:latin typeface="Times New Roman" panose="02020603050405020304" pitchFamily="18" charset="0"/>
+                <a:cs typeface="Times New Roman" panose="02020603050405020304" pitchFamily="18" charset="0"/>
+              </a:rPr>
+              <a:t> capacitor has a charge of 240 </a:t>
+            </a:r>
+            <a:r>
+              <a:rPr lang="en-US" dirty="0" err="1">
+                <a:latin typeface="Times New Roman" panose="02020603050405020304" pitchFamily="18" charset="0"/>
+                <a:cs typeface="Times New Roman" panose="02020603050405020304" pitchFamily="18" charset="0"/>
+              </a:rPr>
+              <a:t>μC</a:t>
+            </a:r>
+            <a:r>
+              <a:rPr lang="en-US" dirty="0">
+                <a:latin typeface="Times New Roman" panose="02020603050405020304" pitchFamily="18" charset="0"/>
+                <a:cs typeface="Times New Roman" panose="02020603050405020304" pitchFamily="18" charset="0"/>
+              </a:rPr>
+              <a:t> is connected to a 50 </a:t>
+            </a:r>
+            <a:r>
+              <a:rPr lang="en-US" dirty="0" err="1">
+                <a:latin typeface="Times New Roman" panose="02020603050405020304" pitchFamily="18" charset="0"/>
+                <a:cs typeface="Times New Roman" panose="02020603050405020304" pitchFamily="18" charset="0"/>
+              </a:rPr>
+              <a:t>kΩ</a:t>
+            </a:r>
+            <a:r>
+              <a:rPr lang="en-US" dirty="0">
+                <a:latin typeface="Times New Roman" panose="02020603050405020304" pitchFamily="18" charset="0"/>
+                <a:cs typeface="Times New Roman" panose="02020603050405020304" pitchFamily="18" charset="0"/>
+              </a:rPr>
+              <a:t> resistor. Calculate the:</a:t>
+            </a:r>
+          </a:p>
+          <a:p>
+            <a:endParaRPr lang="en-US" dirty="0">
+              <a:latin typeface="Times New Roman" panose="02020603050405020304" pitchFamily="18" charset="0"/>
+              <a:cs typeface="Times New Roman" panose="02020603050405020304" pitchFamily="18" charset="0"/>
+            </a:endParaRPr>
+          </a:p>
+          <a:p>
+            <a:r>
+              <a:rPr lang="en-US" dirty="0">
+                <a:latin typeface="Times New Roman" panose="02020603050405020304" pitchFamily="18" charset="0"/>
+                <a:cs typeface="Times New Roman" panose="02020603050405020304" pitchFamily="18" charset="0"/>
+              </a:rPr>
+              <a:t> </a:t>
+            </a:r>
+            <a:r>
+              <a:rPr lang="en-US" dirty="0" err="1">
+                <a:latin typeface="Times New Roman" panose="02020603050405020304" pitchFamily="18" charset="0"/>
+                <a:cs typeface="Times New Roman" panose="02020603050405020304" pitchFamily="18" charset="0"/>
+              </a:rPr>
+              <a:t>i</a:t>
+            </a:r>
+            <a:r>
+              <a:rPr lang="en-US" dirty="0">
+                <a:latin typeface="Times New Roman" panose="02020603050405020304" pitchFamily="18" charset="0"/>
+                <a:cs typeface="Times New Roman" panose="02020603050405020304" pitchFamily="18" charset="0"/>
+              </a:rPr>
+              <a:t>) time constant. </a:t>
+            </a:r>
+          </a:p>
+          <a:p>
+            <a:r>
+              <a:rPr lang="en-US" dirty="0">
+                <a:latin typeface="Times New Roman" panose="02020603050405020304" pitchFamily="18" charset="0"/>
+                <a:cs typeface="Times New Roman" panose="02020603050405020304" pitchFamily="18" charset="0"/>
+              </a:rPr>
+              <a:t>ii) initial current. </a:t>
+            </a:r>
+          </a:p>
+          <a:p>
+            <a:r>
+              <a:rPr lang="en-US" dirty="0">
+                <a:latin typeface="Times New Roman" panose="02020603050405020304" pitchFamily="18" charset="0"/>
+                <a:cs typeface="Times New Roman" panose="02020603050405020304" pitchFamily="18" charset="0"/>
+              </a:rPr>
+              <a:t>iii) charge stored in the capacitor after 5 s.</a:t>
+            </a:r>
+            <a:endParaRPr lang="en-MY" dirty="0">
+              <a:latin typeface="Times New Roman" panose="02020603050405020304" pitchFamily="18" charset="0"/>
+              <a:cs typeface="Times New Roman" panose="02020603050405020304" pitchFamily="18" charset="0"/>
+            </a:endParaRPr>
+          </a:p>
+        </p:txBody>
+      </p:sp>
+      <p:sp>
+        <p:nvSpPr>
+          <p:cNvPr id="5" name="TextBox 4">
+            <a:extLst>
+              <a:ext uri="{FF2B5EF4-FFF2-40B4-BE49-F238E27FC236}">
+                <a16:creationId xmlns:a16="http://schemas.microsoft.com/office/drawing/2014/main" id="{EF4D106A-E250-B11D-0AFC-626582FA74CF}"/>
+              </a:ext>
+            </a:extLst>
+          </p:cNvPr>
+          <p:cNvSpPr txBox="1"/>
+          <p:nvPr/>
+        </p:nvSpPr>
+        <p:spPr>
+          <a:xfrm>
+            <a:off x="819149" y="2690336"/>
+            <a:ext cx="10553699" cy="1200329"/>
+          </a:xfrm>
+          <a:prstGeom prst="rect">
+            <a:avLst/>
+          </a:prstGeom>
+          <a:noFill/>
+        </p:spPr>
+        <p:txBody>
+          <a:bodyPr wrap="square">
+            <a:spAutoFit/>
+          </a:bodyPr>
+          <a:lstStyle/>
+          <a:p>
+            <a:pPr>
+              <a:buNone/>
+            </a:pPr>
+            <a:r>
+              <a:rPr lang="en-US" b="1" dirty="0">
+                <a:latin typeface="Times New Roman" panose="02020603050405020304" pitchFamily="18" charset="0"/>
+                <a:cs typeface="Times New Roman" panose="02020603050405020304" pitchFamily="18" charset="0"/>
+              </a:rPr>
+              <a:t>b)</a:t>
+            </a:r>
+            <a:r>
+              <a:rPr lang="en-US" dirty="0">
+                <a:latin typeface="Times New Roman" panose="02020603050405020304" pitchFamily="18" charset="0"/>
+                <a:cs typeface="Times New Roman" panose="02020603050405020304" pitchFamily="18" charset="0"/>
+              </a:rPr>
+              <a:t> A parallel plate capacitor has plates of area 6 m² separated by a piece of paper. The dielectric constant and thickness of the paper are 3.7 and 1 mm respectively. Calculate the capacitance of the capacitor.</a:t>
+            </a:r>
+          </a:p>
+          <a:p>
+            <a:pPr>
+              <a:buNone/>
+            </a:pPr>
+            <a:endParaRPr lang="en-US" dirty="0">
+              <a:latin typeface="Times New Roman" panose="02020603050405020304" pitchFamily="18" charset="0"/>
+              <a:cs typeface="Times New Roman" panose="02020603050405020304" pitchFamily="18" charset="0"/>
+            </a:endParaRPr>
+          </a:p>
+          <a:p>
+            <a:pPr algn="r">
+              <a:buNone/>
+            </a:pPr>
+            <a:r>
+              <a:rPr lang="en-US" dirty="0">
+                <a:latin typeface="Times New Roman" panose="02020603050405020304" pitchFamily="18" charset="0"/>
+                <a:cs typeface="Times New Roman" panose="02020603050405020304" pitchFamily="18" charset="0"/>
+              </a:rPr>
+              <a:t>[7 marks]</a:t>
+            </a:r>
+          </a:p>
+        </p:txBody>
+      </p:sp>
+      <p:pic>
+        <p:nvPicPr>
+          <p:cNvPr id="7" name="Picture 6">
+            <a:extLst>
+              <a:ext uri="{FF2B5EF4-FFF2-40B4-BE49-F238E27FC236}">
+                <a16:creationId xmlns:a16="http://schemas.microsoft.com/office/drawing/2014/main" id="{D2ED838E-E55C-3A96-AD3D-F9F4F46B7B7A}"/>
+              </a:ext>
+            </a:extLst>
+          </p:cNvPr>
+          <p:cNvPicPr>
+            <a:picLocks noChangeAspect="1"/>
+          </p:cNvPicPr>
+          <p:nvPr/>
+        </p:nvPicPr>
+        <p:blipFill>
+          <a:blip r:embed="rId2"/>
+          <a:stretch>
+            <a:fillRect/>
+          </a:stretch>
+        </p:blipFill>
+        <p:spPr>
+          <a:xfrm>
+            <a:off x="7047782" y="5812453"/>
+            <a:ext cx="5144218" cy="895475"/>
+          </a:xfrm>
+          <a:prstGeom prst="rect">
+            <a:avLst/>
+          </a:prstGeom>
+        </p:spPr>
+      </p:pic>
+    </p:spTree>
+    <p:extLst>
+      <p:ext uri="{BB962C8B-B14F-4D97-AF65-F5344CB8AC3E}">
+        <p14:creationId xmlns:p14="http://schemas.microsoft.com/office/powerpoint/2010/main" val="1297245959"/>
+      </p:ext>
+    </p:extLst>
+  </p:cSld>
+  <p:clrMapOvr>
+    <a:masterClrMapping/>
+  </p:clrMapOvr>
+</p:sld>
+</file>
+
+<file path=ppt/slides/slide6.xml><?xml version="1.0" encoding="utf-8"?>
+<p:sld xmlns:a="http://schemas.openxmlformats.org/drawingml/2006/main" xmlns:r="http://schemas.openxmlformats.org/officeDocument/2006/relationships" xmlns:p="http://schemas.openxmlformats.org/presentationml/2006/main">
+  <p:cSld>
+    <p:spTree>
+      <p:nvGrpSpPr>
+        <p:cNvPr id="1" name=""/>
+        <p:cNvGrpSpPr/>
+        <p:nvPr/>
+      </p:nvGrpSpPr>
+      <p:grpSpPr>
+        <a:xfrm>
+          <a:off x="0" y="0"/>
+          <a:ext cx="0" cy="0"/>
+          <a:chOff x="0" y="0"/>
+          <a:chExt cx="0" cy="0"/>
+        </a:xfrm>
+      </p:grpSpPr>
+      <p:sp>
+        <p:nvSpPr>
+          <p:cNvPr id="7" name="TextBox 6">
+            <a:extLst>
+              <a:ext uri="{FF2B5EF4-FFF2-40B4-BE49-F238E27FC236}">
+                <a16:creationId xmlns:a16="http://schemas.microsoft.com/office/drawing/2014/main" id="{D167A598-CB6D-361A-69DA-0552F8D16042}"/>
+              </a:ext>
+            </a:extLst>
+          </p:cNvPr>
+          <p:cNvSpPr txBox="1"/>
+          <p:nvPr/>
+        </p:nvSpPr>
+        <p:spPr>
+          <a:xfrm>
+            <a:off x="4084320" y="332939"/>
+            <a:ext cx="8855920" cy="643702"/>
+          </a:xfrm>
+          <a:prstGeom prst="rect">
+            <a:avLst/>
+          </a:prstGeom>
+          <a:noFill/>
+        </p:spPr>
+        <p:txBody>
+          <a:bodyPr wrap="square">
+            <a:spAutoFit/>
+          </a:bodyPr>
+          <a:lstStyle/>
+          <a:p>
+            <a:pPr marL="950595" marR="631190">
+              <a:lnSpc>
+                <a:spcPct val="101000"/>
+              </a:lnSpc>
+              <a:spcBef>
+                <a:spcPts val="380"/>
+              </a:spcBef>
+              <a:buNone/>
+            </a:pPr>
+            <a:r>
+              <a:rPr lang="en-US" b="1" dirty="0">
+                <a:latin typeface="Times New Roman" panose="02020603050405020304" pitchFamily="18" charset="0"/>
+                <a:cs typeface="Times New Roman" panose="02020603050405020304" pitchFamily="18" charset="0"/>
+              </a:rPr>
+              <a:t>2 a). FIGURE 2a</a:t>
+            </a:r>
+            <a:r>
+              <a:rPr lang="en-US" dirty="0">
+                <a:latin typeface="Times New Roman" panose="02020603050405020304" pitchFamily="18" charset="0"/>
+                <a:cs typeface="Times New Roman" panose="02020603050405020304" pitchFamily="18" charset="0"/>
+              </a:rPr>
+              <a:t> shows an arrangement of three capacitors, C₁, C₂ and C₃. Calculate:</a:t>
+            </a:r>
+            <a:endParaRPr lang="en-MY" sz="1800" dirty="0">
+              <a:effectLst/>
+              <a:latin typeface="Times New Roman" panose="02020603050405020304" pitchFamily="18" charset="0"/>
+              <a:ea typeface="Times New Roman" panose="02020603050405020304" pitchFamily="18" charset="0"/>
+              <a:cs typeface="Times New Roman" panose="02020603050405020304" pitchFamily="18" charset="0"/>
+            </a:endParaRPr>
+          </a:p>
+        </p:txBody>
+      </p:sp>
+      <p:sp>
+        <p:nvSpPr>
+          <p:cNvPr id="9" name="TextBox 8">
+            <a:extLst>
+              <a:ext uri="{FF2B5EF4-FFF2-40B4-BE49-F238E27FC236}">
+                <a16:creationId xmlns:a16="http://schemas.microsoft.com/office/drawing/2014/main" id="{9EB446E1-9C19-47BE-8EDB-88CB0637B87B}"/>
+              </a:ext>
+            </a:extLst>
+          </p:cNvPr>
+          <p:cNvSpPr txBox="1"/>
+          <p:nvPr/>
+        </p:nvSpPr>
+        <p:spPr>
+          <a:xfrm>
+            <a:off x="5090160" y="1123428"/>
+            <a:ext cx="6844240" cy="923330"/>
+          </a:xfrm>
+          <a:prstGeom prst="rect">
+            <a:avLst/>
+          </a:prstGeom>
+          <a:noFill/>
+        </p:spPr>
+        <p:txBody>
+          <a:bodyPr wrap="square">
+            <a:spAutoFit/>
+          </a:bodyPr>
+          <a:lstStyle/>
+          <a:p>
+            <a:pPr marL="400050" indent="-400050">
+              <a:buAutoNum type="romanLcParenR"/>
+            </a:pPr>
+            <a:r>
+              <a:rPr lang="en-US" dirty="0">
+                <a:latin typeface="Times New Roman" panose="02020603050405020304" pitchFamily="18" charset="0"/>
+                <a:cs typeface="Times New Roman" panose="02020603050405020304" pitchFamily="18" charset="0"/>
+              </a:rPr>
+              <a:t>total charge of these capacitors.</a:t>
+            </a:r>
+          </a:p>
+          <a:p>
+            <a:r>
+              <a:rPr lang="en-US" dirty="0">
+                <a:latin typeface="Times New Roman" panose="02020603050405020304" pitchFamily="18" charset="0"/>
+                <a:cs typeface="Times New Roman" panose="02020603050405020304" pitchFamily="18" charset="0"/>
+              </a:rPr>
+              <a:t>ii)   potential difference across capacitor C₂.</a:t>
+            </a:r>
+          </a:p>
+          <a:p>
+            <a:pPr algn="r"/>
+            <a:r>
+              <a:rPr lang="en-US" dirty="0">
+                <a:latin typeface="Times New Roman" panose="02020603050405020304" pitchFamily="18" charset="0"/>
+                <a:cs typeface="Times New Roman" panose="02020603050405020304" pitchFamily="18" charset="0"/>
+              </a:rPr>
+              <a:t>[5 marks]</a:t>
+            </a:r>
+          </a:p>
+        </p:txBody>
+      </p:sp>
+      <p:pic>
+        <p:nvPicPr>
+          <p:cNvPr id="4" name="Picture 3">
+            <a:extLst>
+              <a:ext uri="{FF2B5EF4-FFF2-40B4-BE49-F238E27FC236}">
+                <a16:creationId xmlns:a16="http://schemas.microsoft.com/office/drawing/2014/main" id="{80BDA4F1-E653-BC77-6A0B-99B904724297}"/>
+              </a:ext>
+            </a:extLst>
+          </p:cNvPr>
+          <p:cNvPicPr>
+            <a:picLocks noChangeAspect="1"/>
+          </p:cNvPicPr>
+          <p:nvPr/>
+        </p:nvPicPr>
+        <p:blipFill>
+          <a:blip r:embed="rId2"/>
+          <a:stretch>
+            <a:fillRect/>
+          </a:stretch>
+        </p:blipFill>
+        <p:spPr>
+          <a:xfrm>
+            <a:off x="133908" y="269988"/>
+            <a:ext cx="4511816" cy="1706880"/>
+          </a:xfrm>
+          <a:prstGeom prst="rect">
+            <a:avLst/>
+          </a:prstGeom>
+        </p:spPr>
+      </p:pic>
+      <p:pic>
+        <p:nvPicPr>
+          <p:cNvPr id="6" name="Picture 5">
+            <a:extLst>
+              <a:ext uri="{FF2B5EF4-FFF2-40B4-BE49-F238E27FC236}">
+                <a16:creationId xmlns:a16="http://schemas.microsoft.com/office/drawing/2014/main" id="{EA4288EB-43DB-AECC-D3A4-FD885D203E82}"/>
+              </a:ext>
+            </a:extLst>
+          </p:cNvPr>
+          <p:cNvPicPr>
+            <a:picLocks noChangeAspect="1"/>
+          </p:cNvPicPr>
+          <p:nvPr/>
+        </p:nvPicPr>
+        <p:blipFill>
+          <a:blip r:embed="rId3"/>
+          <a:stretch>
+            <a:fillRect/>
+          </a:stretch>
+        </p:blipFill>
+        <p:spPr>
+          <a:xfrm>
+            <a:off x="889103" y="2582631"/>
+            <a:ext cx="3195217" cy="2074982"/>
+          </a:xfrm>
+          <a:prstGeom prst="rect">
+            <a:avLst/>
+          </a:prstGeom>
+        </p:spPr>
+      </p:pic>
+      <p:sp>
+        <p:nvSpPr>
+          <p:cNvPr id="10" name="TextBox 9">
+            <a:extLst>
+              <a:ext uri="{FF2B5EF4-FFF2-40B4-BE49-F238E27FC236}">
+                <a16:creationId xmlns:a16="http://schemas.microsoft.com/office/drawing/2014/main" id="{03A1C7E8-B6EA-0010-1453-1D93A9C63560}"/>
+              </a:ext>
+            </a:extLst>
+          </p:cNvPr>
+          <p:cNvSpPr txBox="1"/>
+          <p:nvPr/>
+        </p:nvSpPr>
+        <p:spPr>
+          <a:xfrm>
+            <a:off x="5090160" y="2767322"/>
+            <a:ext cx="6844240" cy="1477328"/>
+          </a:xfrm>
+          <a:prstGeom prst="rect">
+            <a:avLst/>
+          </a:prstGeom>
+          <a:noFill/>
+        </p:spPr>
+        <p:txBody>
+          <a:bodyPr wrap="square">
+            <a:spAutoFit/>
+          </a:bodyPr>
+          <a:lstStyle/>
+          <a:p>
+            <a:pPr>
+              <a:buNone/>
+            </a:pPr>
+            <a:r>
+              <a:rPr lang="en-US" b="1" dirty="0">
+                <a:latin typeface="Times New Roman" panose="02020603050405020304" pitchFamily="18" charset="0"/>
+                <a:cs typeface="Times New Roman" panose="02020603050405020304" pitchFamily="18" charset="0"/>
+              </a:rPr>
+              <a:t>2 b) FIGURE 2b</a:t>
+            </a:r>
+            <a:r>
+              <a:rPr lang="en-US" dirty="0">
+                <a:latin typeface="Times New Roman" panose="02020603050405020304" pitchFamily="18" charset="0"/>
+                <a:cs typeface="Times New Roman" panose="02020603050405020304" pitchFamily="18" charset="0"/>
+              </a:rPr>
+              <a:t> shows a charging capacitor circuit where a capacitor charges through a resistor when the switch is closed. If the capacitance and resistance is 0.2 </a:t>
+            </a:r>
+            <a:r>
+              <a:rPr lang="en-US" dirty="0" err="1">
+                <a:latin typeface="Times New Roman" panose="02020603050405020304" pitchFamily="18" charset="0"/>
+                <a:cs typeface="Times New Roman" panose="02020603050405020304" pitchFamily="18" charset="0"/>
+              </a:rPr>
+              <a:t>μF</a:t>
+            </a:r>
+            <a:r>
+              <a:rPr lang="en-US" dirty="0">
+                <a:latin typeface="Times New Roman" panose="02020603050405020304" pitchFamily="18" charset="0"/>
+                <a:cs typeface="Times New Roman" panose="02020603050405020304" pitchFamily="18" charset="0"/>
+              </a:rPr>
+              <a:t> and 15 </a:t>
+            </a:r>
+            <a:r>
+              <a:rPr lang="en-US" dirty="0" err="1">
+                <a:latin typeface="Times New Roman" panose="02020603050405020304" pitchFamily="18" charset="0"/>
+                <a:cs typeface="Times New Roman" panose="02020603050405020304" pitchFamily="18" charset="0"/>
+              </a:rPr>
+              <a:t>kΩ</a:t>
+            </a:r>
+            <a:r>
+              <a:rPr lang="en-US" dirty="0">
+                <a:latin typeface="Times New Roman" panose="02020603050405020304" pitchFamily="18" charset="0"/>
+                <a:cs typeface="Times New Roman" panose="02020603050405020304" pitchFamily="18" charset="0"/>
+              </a:rPr>
+              <a:t> respectively, calculate the time taken for the charge to reach 60% of its maximum value.</a:t>
+            </a:r>
+          </a:p>
+          <a:p>
+            <a:pPr algn="r">
+              <a:buNone/>
+            </a:pPr>
+            <a:r>
+              <a:rPr lang="en-US" dirty="0">
+                <a:latin typeface="Times New Roman" panose="02020603050405020304" pitchFamily="18" charset="0"/>
+                <a:cs typeface="Times New Roman" panose="02020603050405020304" pitchFamily="18" charset="0"/>
+              </a:rPr>
+              <a:t>[2 marks]</a:t>
+            </a:r>
+          </a:p>
+        </p:txBody>
+      </p:sp>
+      <p:sp>
+        <p:nvSpPr>
+          <p:cNvPr id="12" name="TextBox 11">
+            <a:extLst>
+              <a:ext uri="{FF2B5EF4-FFF2-40B4-BE49-F238E27FC236}">
+                <a16:creationId xmlns:a16="http://schemas.microsoft.com/office/drawing/2014/main" id="{796C7BCE-0486-CDDE-396D-1DF480CEA454}"/>
+              </a:ext>
+            </a:extLst>
+          </p:cNvPr>
+          <p:cNvSpPr txBox="1"/>
+          <p:nvPr/>
+        </p:nvSpPr>
+        <p:spPr>
+          <a:xfrm>
+            <a:off x="1458097" y="2224216"/>
+            <a:ext cx="2397211" cy="369332"/>
+          </a:xfrm>
+          <a:prstGeom prst="rect">
+            <a:avLst/>
+          </a:prstGeom>
+          <a:noFill/>
+        </p:spPr>
+        <p:txBody>
+          <a:bodyPr wrap="square" rtlCol="0">
+            <a:spAutoFit/>
+          </a:bodyPr>
+          <a:lstStyle/>
+          <a:p>
+            <a:pPr algn="ctr"/>
+            <a:r>
+              <a:rPr lang="en-US" b="1" dirty="0">
+                <a:latin typeface="Times New Roman" panose="02020603050405020304" pitchFamily="18" charset="0"/>
+                <a:cs typeface="Times New Roman" panose="02020603050405020304" pitchFamily="18" charset="0"/>
+              </a:rPr>
+              <a:t>FIGURE 2a</a:t>
+            </a:r>
+            <a:endParaRPr lang="en-MY" dirty="0"/>
+          </a:p>
+        </p:txBody>
+      </p:sp>
+      <p:sp>
+        <p:nvSpPr>
+          <p:cNvPr id="14" name="TextBox 13">
+            <a:extLst>
+              <a:ext uri="{FF2B5EF4-FFF2-40B4-BE49-F238E27FC236}">
+                <a16:creationId xmlns:a16="http://schemas.microsoft.com/office/drawing/2014/main" id="{A274C90B-99AE-8A84-8B1D-1D920AA7E1E8}"/>
+              </a:ext>
+            </a:extLst>
+          </p:cNvPr>
+          <p:cNvSpPr txBox="1"/>
+          <p:nvPr/>
+        </p:nvSpPr>
+        <p:spPr>
+          <a:xfrm>
+            <a:off x="1288105" y="4831362"/>
+            <a:ext cx="2397211" cy="369332"/>
+          </a:xfrm>
+          <a:prstGeom prst="rect">
+            <a:avLst/>
+          </a:prstGeom>
+          <a:noFill/>
+        </p:spPr>
+        <p:txBody>
+          <a:bodyPr wrap="square" rtlCol="0">
+            <a:spAutoFit/>
+          </a:bodyPr>
+          <a:lstStyle/>
+          <a:p>
+            <a:pPr algn="ctr"/>
+            <a:r>
+              <a:rPr lang="en-US" b="1" dirty="0">
+                <a:latin typeface="Times New Roman" panose="02020603050405020304" pitchFamily="18" charset="0"/>
+                <a:cs typeface="Times New Roman" panose="02020603050405020304" pitchFamily="18" charset="0"/>
+              </a:rPr>
+              <a:t>FIGURE 2b</a:t>
+            </a:r>
+            <a:endParaRPr lang="en-MY" dirty="0"/>
+          </a:p>
+        </p:txBody>
+      </p:sp>
+      <p:pic>
+        <p:nvPicPr>
+          <p:cNvPr id="3" name="Picture 2">
+            <a:extLst>
+              <a:ext uri="{FF2B5EF4-FFF2-40B4-BE49-F238E27FC236}">
+                <a16:creationId xmlns:a16="http://schemas.microsoft.com/office/drawing/2014/main" id="{7530F2F7-DDED-47FF-A8B4-884E1C56EFD9}"/>
+              </a:ext>
+            </a:extLst>
+          </p:cNvPr>
+          <p:cNvPicPr>
+            <a:picLocks noChangeAspect="1"/>
+          </p:cNvPicPr>
+          <p:nvPr/>
+        </p:nvPicPr>
+        <p:blipFill>
+          <a:blip r:embed="rId4"/>
+          <a:stretch>
+            <a:fillRect/>
+          </a:stretch>
+        </p:blipFill>
+        <p:spPr>
+          <a:xfrm>
+            <a:off x="4557498" y="3076526"/>
+            <a:ext cx="3077004" cy="704948"/>
+          </a:xfrm>
+          <a:prstGeom prst="rect">
+            <a:avLst/>
+          </a:prstGeom>
+        </p:spPr>
+      </p:pic>
+      <p:pic>
+        <p:nvPicPr>
+          <p:cNvPr id="8" name="Picture 7">
+            <a:extLst>
+              <a:ext uri="{FF2B5EF4-FFF2-40B4-BE49-F238E27FC236}">
+                <a16:creationId xmlns:a16="http://schemas.microsoft.com/office/drawing/2014/main" id="{01909E4A-8FB0-8FE8-9EAA-20A47AB6662F}"/>
+              </a:ext>
+            </a:extLst>
+          </p:cNvPr>
+          <p:cNvPicPr>
+            <a:picLocks noChangeAspect="1"/>
+          </p:cNvPicPr>
+          <p:nvPr/>
+        </p:nvPicPr>
+        <p:blipFill>
+          <a:blip r:embed="rId4"/>
+          <a:stretch>
+            <a:fillRect/>
+          </a:stretch>
+        </p:blipFill>
+        <p:spPr>
+          <a:xfrm>
+            <a:off x="9114996" y="6033086"/>
+            <a:ext cx="3077004" cy="704948"/>
+          </a:xfrm>
+          <a:prstGeom prst="rect">
+            <a:avLst/>
+          </a:prstGeom>
+        </p:spPr>
+      </p:pic>
+    </p:spTree>
+    <p:extLst>
+      <p:ext uri="{BB962C8B-B14F-4D97-AF65-F5344CB8AC3E}">
+        <p14:creationId xmlns:p14="http://schemas.microsoft.com/office/powerpoint/2010/main" val="2713335173"/>
+      </p:ext>
+    </p:extLst>
+  </p:cSld>
+  <p:clrMapOvr>
+    <a:masterClrMapping/>
+  </p:clrMapOvr>
+</p:sld>
+</file>
+
+<file path=ppt/slides/slide7.xml><?xml version="1.0" encoding="utf-8"?>
+<p:sld xmlns:a="http://schemas.openxmlformats.org/drawingml/2006/main" xmlns:r="http://schemas.openxmlformats.org/officeDocument/2006/relationships" xmlns:p="http://schemas.openxmlformats.org/presentationml/2006/main">
+  <p:cSld>
+    <p:spTree>
+      <p:nvGrpSpPr>
+        <p:cNvPr id="1" name=""/>
+        <p:cNvGrpSpPr/>
+        <p:nvPr/>
+      </p:nvGrpSpPr>
+      <p:grpSpPr>
+        <a:xfrm>
+          <a:off x="0" y="0"/>
+          <a:ext cx="0" cy="0"/>
+          <a:chOff x="0" y="0"/>
+          <a:chExt cx="0" cy="0"/>
+        </a:xfrm>
+      </p:grpSpPr>
+      <p:sp>
+        <p:nvSpPr>
+          <p:cNvPr id="3" name="TextBox 2">
+            <a:extLst>
+              <a:ext uri="{FF2B5EF4-FFF2-40B4-BE49-F238E27FC236}">
+                <a16:creationId xmlns:a16="http://schemas.microsoft.com/office/drawing/2014/main" id="{51F03D6E-18CE-281E-AC48-456016C66453}"/>
+              </a:ext>
+            </a:extLst>
+          </p:cNvPr>
+          <p:cNvSpPr txBox="1"/>
+          <p:nvPr/>
+        </p:nvSpPr>
+        <p:spPr>
+          <a:xfrm>
+            <a:off x="4395018" y="449520"/>
+            <a:ext cx="6268065" cy="1767150"/>
+          </a:xfrm>
+          <a:prstGeom prst="rect">
+            <a:avLst/>
+          </a:prstGeom>
+          <a:noFill/>
+        </p:spPr>
+        <p:txBody>
+          <a:bodyPr wrap="square">
+            <a:spAutoFit/>
+          </a:bodyPr>
+          <a:lstStyle/>
+          <a:p>
+            <a:pPr marL="1003935">
+              <a:spcBef>
+                <a:spcPts val="160"/>
+              </a:spcBef>
+              <a:buNone/>
+            </a:pPr>
+            <a:r>
+              <a:rPr lang="en-US" b="1" dirty="0">
+                <a:effectLst/>
+                <a:latin typeface="Times New Roman" panose="02020603050405020304" pitchFamily="18" charset="0"/>
+                <a:ea typeface="Times New Roman" panose="02020603050405020304" pitchFamily="18" charset="0"/>
+              </a:rPr>
+              <a:t>2 (a) FIGURE</a:t>
+            </a:r>
+            <a:r>
+              <a:rPr lang="en-US" b="1" spc="-10" dirty="0">
+                <a:effectLst/>
+                <a:latin typeface="Times New Roman" panose="02020603050405020304" pitchFamily="18" charset="0"/>
+                <a:ea typeface="Times New Roman" panose="02020603050405020304" pitchFamily="18" charset="0"/>
+              </a:rPr>
+              <a:t> </a:t>
+            </a:r>
+            <a:r>
+              <a:rPr lang="en-US" b="1" dirty="0">
+                <a:effectLst/>
+                <a:latin typeface="Times New Roman" panose="02020603050405020304" pitchFamily="18" charset="0"/>
+                <a:ea typeface="Times New Roman" panose="02020603050405020304" pitchFamily="18" charset="0"/>
+              </a:rPr>
+              <a:t>2.1</a:t>
+            </a:r>
+            <a:r>
+              <a:rPr lang="en-US" b="1" spc="-5" dirty="0">
+                <a:effectLst/>
+                <a:latin typeface="Times New Roman" panose="02020603050405020304" pitchFamily="18" charset="0"/>
+                <a:ea typeface="Times New Roman" panose="02020603050405020304" pitchFamily="18" charset="0"/>
+              </a:rPr>
+              <a:t> </a:t>
+            </a:r>
+            <a:r>
+              <a:rPr lang="en-US" dirty="0">
+                <a:effectLst/>
+                <a:latin typeface="Times New Roman" panose="02020603050405020304" pitchFamily="18" charset="0"/>
+                <a:ea typeface="Times New Roman" panose="02020603050405020304" pitchFamily="18" charset="0"/>
+              </a:rPr>
+              <a:t>shows a</a:t>
+            </a:r>
+            <a:r>
+              <a:rPr lang="en-US" spc="-10" dirty="0">
+                <a:effectLst/>
+                <a:latin typeface="Times New Roman" panose="02020603050405020304" pitchFamily="18" charset="0"/>
+                <a:ea typeface="Times New Roman" panose="02020603050405020304" pitchFamily="18" charset="0"/>
+              </a:rPr>
+              <a:t> </a:t>
+            </a:r>
+            <a:r>
+              <a:rPr lang="en-US" dirty="0">
+                <a:effectLst/>
+                <a:latin typeface="Times New Roman" panose="02020603050405020304" pitchFamily="18" charset="0"/>
+                <a:ea typeface="Times New Roman" panose="02020603050405020304" pitchFamily="18" charset="0"/>
+              </a:rPr>
+              <a:t>configuration</a:t>
+            </a:r>
+            <a:r>
+              <a:rPr lang="en-US" spc="-5" dirty="0">
+                <a:effectLst/>
+                <a:latin typeface="Times New Roman" panose="02020603050405020304" pitchFamily="18" charset="0"/>
+                <a:ea typeface="Times New Roman" panose="02020603050405020304" pitchFamily="18" charset="0"/>
+              </a:rPr>
+              <a:t> </a:t>
+            </a:r>
+            <a:r>
+              <a:rPr lang="en-US" dirty="0">
+                <a:effectLst/>
+                <a:latin typeface="Times New Roman" panose="02020603050405020304" pitchFamily="18" charset="0"/>
+                <a:ea typeface="Times New Roman" panose="02020603050405020304" pitchFamily="18" charset="0"/>
+              </a:rPr>
+              <a:t>of</a:t>
+            </a:r>
+            <a:r>
+              <a:rPr lang="en-US" spc="-5" dirty="0">
+                <a:effectLst/>
+                <a:latin typeface="Times New Roman" panose="02020603050405020304" pitchFamily="18" charset="0"/>
+                <a:ea typeface="Times New Roman" panose="02020603050405020304" pitchFamily="18" charset="0"/>
+              </a:rPr>
+              <a:t> </a:t>
+            </a:r>
+            <a:r>
+              <a:rPr lang="en-US" dirty="0">
+                <a:effectLst/>
+                <a:latin typeface="Times New Roman" panose="02020603050405020304" pitchFamily="18" charset="0"/>
+                <a:ea typeface="Times New Roman" panose="02020603050405020304" pitchFamily="18" charset="0"/>
+              </a:rPr>
+              <a:t>four</a:t>
+            </a:r>
+            <a:r>
+              <a:rPr lang="en-US" spc="-15" dirty="0">
+                <a:effectLst/>
+                <a:latin typeface="Times New Roman" panose="02020603050405020304" pitchFamily="18" charset="0"/>
+                <a:ea typeface="Times New Roman" panose="02020603050405020304" pitchFamily="18" charset="0"/>
+              </a:rPr>
+              <a:t> </a:t>
+            </a:r>
+            <a:r>
+              <a:rPr lang="en-US" dirty="0">
+                <a:effectLst/>
+                <a:latin typeface="Times New Roman" panose="02020603050405020304" pitchFamily="18" charset="0"/>
+                <a:ea typeface="Times New Roman" panose="02020603050405020304" pitchFamily="18" charset="0"/>
+              </a:rPr>
+              <a:t>identical</a:t>
+            </a:r>
+            <a:r>
+              <a:rPr lang="en-US" spc="-5" dirty="0">
+                <a:effectLst/>
+                <a:latin typeface="Times New Roman" panose="02020603050405020304" pitchFamily="18" charset="0"/>
+                <a:ea typeface="Times New Roman" panose="02020603050405020304" pitchFamily="18" charset="0"/>
+              </a:rPr>
+              <a:t> </a:t>
+            </a:r>
+            <a:r>
+              <a:rPr lang="en-US" dirty="0">
+                <a:effectLst/>
+                <a:latin typeface="Times New Roman" panose="02020603050405020304" pitchFamily="18" charset="0"/>
+                <a:ea typeface="Times New Roman" panose="02020603050405020304" pitchFamily="18" charset="0"/>
+              </a:rPr>
+              <a:t>capacitors</a:t>
+            </a:r>
+            <a:r>
+              <a:rPr lang="en-US" spc="315" dirty="0">
+                <a:effectLst/>
+                <a:latin typeface="Times New Roman" panose="02020603050405020304" pitchFamily="18" charset="0"/>
+                <a:ea typeface="Times New Roman" panose="02020603050405020304" pitchFamily="18" charset="0"/>
+              </a:rPr>
+              <a:t> </a:t>
+            </a:r>
+            <a:r>
+              <a:rPr lang="en-US" dirty="0">
+                <a:effectLst/>
+                <a:latin typeface="Cambria Math" panose="02040503050406030204" pitchFamily="18" charset="0"/>
+                <a:ea typeface="Cambria Math" panose="02040503050406030204" pitchFamily="18" charset="0"/>
+              </a:rPr>
+              <a:t>𝐶</a:t>
+            </a:r>
+            <a:r>
+              <a:rPr lang="en-US" baseline="-25000" dirty="0">
+                <a:effectLst/>
+                <a:latin typeface="Cambria Math" panose="02040503050406030204" pitchFamily="18" charset="0"/>
+                <a:ea typeface="Cambria Math" panose="02040503050406030204" pitchFamily="18" charset="0"/>
+              </a:rPr>
+              <a:t>1</a:t>
+            </a:r>
+            <a:r>
+              <a:rPr lang="en-US" dirty="0">
+                <a:effectLst/>
+                <a:latin typeface="Times New Roman" panose="02020603050405020304" pitchFamily="18" charset="0"/>
+                <a:ea typeface="Times New Roman" panose="02020603050405020304" pitchFamily="18" charset="0"/>
+              </a:rPr>
+              <a:t>,</a:t>
+            </a:r>
+            <a:r>
+              <a:rPr lang="en-US" spc="-5" dirty="0">
+                <a:effectLst/>
+                <a:latin typeface="Times New Roman" panose="02020603050405020304" pitchFamily="18" charset="0"/>
+                <a:ea typeface="Times New Roman" panose="02020603050405020304" pitchFamily="18" charset="0"/>
+              </a:rPr>
+              <a:t> </a:t>
+            </a:r>
+            <a:r>
+              <a:rPr lang="en-US" dirty="0">
+                <a:effectLst/>
+                <a:latin typeface="Cambria Math" panose="02040503050406030204" pitchFamily="18" charset="0"/>
+                <a:ea typeface="Cambria Math" panose="02040503050406030204" pitchFamily="18" charset="0"/>
+              </a:rPr>
+              <a:t>𝐶</a:t>
+            </a:r>
+            <a:r>
+              <a:rPr lang="en-US" baseline="-25000" dirty="0">
+                <a:effectLst/>
+                <a:latin typeface="Cambria Math" panose="02040503050406030204" pitchFamily="18" charset="0"/>
+                <a:ea typeface="Cambria Math" panose="02040503050406030204" pitchFamily="18" charset="0"/>
+              </a:rPr>
+              <a:t>2</a:t>
+            </a:r>
+            <a:r>
+              <a:rPr lang="en-US" i="1" dirty="0">
+                <a:effectLst/>
+                <a:latin typeface="Times New Roman" panose="02020603050405020304" pitchFamily="18" charset="0"/>
+                <a:ea typeface="Times New Roman" panose="02020603050405020304" pitchFamily="18" charset="0"/>
+              </a:rPr>
+              <a:t>, </a:t>
+            </a:r>
+            <a:r>
+              <a:rPr lang="en-US" dirty="0">
+                <a:effectLst/>
+                <a:latin typeface="Cambria Math" panose="02040503050406030204" pitchFamily="18" charset="0"/>
+                <a:ea typeface="Cambria Math" panose="02040503050406030204" pitchFamily="18" charset="0"/>
+              </a:rPr>
+              <a:t>𝐶</a:t>
+            </a:r>
+            <a:r>
+              <a:rPr lang="en-US" baseline="-25000" dirty="0">
+                <a:effectLst/>
+                <a:latin typeface="Cambria Math" panose="02040503050406030204" pitchFamily="18" charset="0"/>
+                <a:ea typeface="Cambria Math" panose="02040503050406030204" pitchFamily="18" charset="0"/>
+              </a:rPr>
+              <a:t>3</a:t>
+            </a:r>
+            <a:r>
+              <a:rPr lang="en-US" spc="75" dirty="0">
+                <a:effectLst/>
+                <a:latin typeface="Cambria Math" panose="02040503050406030204" pitchFamily="18" charset="0"/>
+                <a:ea typeface="Cambria Math" panose="02040503050406030204" pitchFamily="18" charset="0"/>
+              </a:rPr>
+              <a:t> </a:t>
+            </a:r>
+            <a:r>
+              <a:rPr lang="en-US" spc="-25" dirty="0">
+                <a:effectLst/>
+                <a:latin typeface="Times New Roman" panose="02020603050405020304" pitchFamily="18" charset="0"/>
+                <a:ea typeface="Times New Roman" panose="02020603050405020304" pitchFamily="18" charset="0"/>
+              </a:rPr>
+              <a:t>and </a:t>
+            </a:r>
+            <a:r>
+              <a:rPr lang="en-US" dirty="0">
+                <a:effectLst/>
+                <a:latin typeface="Cambria Math" panose="02040503050406030204" pitchFamily="18" charset="0"/>
+                <a:ea typeface="Cambria Math" panose="02040503050406030204" pitchFamily="18" charset="0"/>
+              </a:rPr>
+              <a:t>𝐶</a:t>
+            </a:r>
+            <a:r>
+              <a:rPr lang="en-US" baseline="-25000" dirty="0">
+                <a:effectLst/>
+                <a:latin typeface="Cambria Math" panose="02040503050406030204" pitchFamily="18" charset="0"/>
+                <a:ea typeface="Cambria Math" panose="02040503050406030204" pitchFamily="18" charset="0"/>
+              </a:rPr>
+              <a:t>4</a:t>
+            </a:r>
+            <a:r>
+              <a:rPr lang="en-US" dirty="0">
+                <a:effectLst/>
+                <a:latin typeface="Times New Roman" panose="02020603050405020304" pitchFamily="18" charset="0"/>
+                <a:ea typeface="Times New Roman" panose="02020603050405020304" pitchFamily="18" charset="0"/>
+              </a:rPr>
+              <a:t>,</a:t>
+            </a:r>
+            <a:r>
+              <a:rPr lang="en-US" spc="-15" dirty="0">
+                <a:effectLst/>
+                <a:latin typeface="Times New Roman" panose="02020603050405020304" pitchFamily="18" charset="0"/>
+                <a:ea typeface="Times New Roman" panose="02020603050405020304" pitchFamily="18" charset="0"/>
+              </a:rPr>
+              <a:t> </a:t>
+            </a:r>
+            <a:r>
+              <a:rPr lang="en-US" dirty="0">
+                <a:effectLst/>
+                <a:latin typeface="Times New Roman" panose="02020603050405020304" pitchFamily="18" charset="0"/>
+                <a:ea typeface="Times New Roman" panose="02020603050405020304" pitchFamily="18" charset="0"/>
+              </a:rPr>
+              <a:t>connected</a:t>
+            </a:r>
+            <a:r>
+              <a:rPr lang="en-US" spc="-15" dirty="0">
+                <a:effectLst/>
+                <a:latin typeface="Times New Roman" panose="02020603050405020304" pitchFamily="18" charset="0"/>
+                <a:ea typeface="Times New Roman" panose="02020603050405020304" pitchFamily="18" charset="0"/>
+              </a:rPr>
+              <a:t> </a:t>
+            </a:r>
+            <a:r>
+              <a:rPr lang="en-US" dirty="0">
+                <a:effectLst/>
+                <a:latin typeface="Times New Roman" panose="02020603050405020304" pitchFamily="18" charset="0"/>
+                <a:ea typeface="Times New Roman" panose="02020603050405020304" pitchFamily="18" charset="0"/>
+              </a:rPr>
+              <a:t>to</a:t>
+            </a:r>
+            <a:r>
+              <a:rPr lang="en-US" spc="-15" dirty="0">
+                <a:effectLst/>
+                <a:latin typeface="Times New Roman" panose="02020603050405020304" pitchFamily="18" charset="0"/>
+                <a:ea typeface="Times New Roman" panose="02020603050405020304" pitchFamily="18" charset="0"/>
+              </a:rPr>
+              <a:t> </a:t>
+            </a:r>
+            <a:r>
+              <a:rPr lang="en-US" dirty="0">
+                <a:effectLst/>
+                <a:latin typeface="Times New Roman" panose="02020603050405020304" pitchFamily="18" charset="0"/>
+                <a:ea typeface="Times New Roman" panose="02020603050405020304" pitchFamily="18" charset="0"/>
+              </a:rPr>
+              <a:t>12</a:t>
+            </a:r>
+            <a:r>
+              <a:rPr lang="en-US" spc="-15" dirty="0">
+                <a:effectLst/>
+                <a:latin typeface="Times New Roman" panose="02020603050405020304" pitchFamily="18" charset="0"/>
+                <a:ea typeface="Times New Roman" panose="02020603050405020304" pitchFamily="18" charset="0"/>
+              </a:rPr>
+              <a:t> </a:t>
+            </a:r>
+            <a:r>
+              <a:rPr lang="en-US" dirty="0">
+                <a:effectLst/>
+                <a:latin typeface="Times New Roman" panose="02020603050405020304" pitchFamily="18" charset="0"/>
+                <a:ea typeface="Times New Roman" panose="02020603050405020304" pitchFamily="18" charset="0"/>
+              </a:rPr>
+              <a:t>V</a:t>
+            </a:r>
+            <a:r>
+              <a:rPr lang="en-US" spc="-15" dirty="0">
+                <a:effectLst/>
+                <a:latin typeface="Times New Roman" panose="02020603050405020304" pitchFamily="18" charset="0"/>
+                <a:ea typeface="Times New Roman" panose="02020603050405020304" pitchFamily="18" charset="0"/>
+              </a:rPr>
+              <a:t> </a:t>
+            </a:r>
+            <a:r>
+              <a:rPr lang="en-US" dirty="0">
+                <a:effectLst/>
+                <a:latin typeface="Times New Roman" panose="02020603050405020304" pitchFamily="18" charset="0"/>
+                <a:ea typeface="Times New Roman" panose="02020603050405020304" pitchFamily="18" charset="0"/>
+              </a:rPr>
+              <a:t>potential</a:t>
+            </a:r>
+            <a:r>
+              <a:rPr lang="en-US" spc="-15" dirty="0">
+                <a:effectLst/>
+                <a:latin typeface="Times New Roman" panose="02020603050405020304" pitchFamily="18" charset="0"/>
+                <a:ea typeface="Times New Roman" panose="02020603050405020304" pitchFamily="18" charset="0"/>
+              </a:rPr>
+              <a:t> </a:t>
+            </a:r>
+            <a:r>
+              <a:rPr lang="en-US" dirty="0">
+                <a:effectLst/>
+                <a:latin typeface="Times New Roman" panose="02020603050405020304" pitchFamily="18" charset="0"/>
+                <a:ea typeface="Times New Roman" panose="02020603050405020304" pitchFamily="18" charset="0"/>
+              </a:rPr>
+              <a:t>difference,</a:t>
+            </a:r>
+            <a:r>
+              <a:rPr lang="en-US" spc="-15" dirty="0">
+                <a:effectLst/>
+                <a:latin typeface="Times New Roman" panose="02020603050405020304" pitchFamily="18" charset="0"/>
+                <a:ea typeface="Times New Roman" panose="02020603050405020304" pitchFamily="18" charset="0"/>
+              </a:rPr>
+              <a:t> </a:t>
+            </a:r>
+            <a:r>
+              <a:rPr lang="en-US" i="1" dirty="0" err="1">
+                <a:effectLst/>
+                <a:latin typeface="Times New Roman" panose="02020603050405020304" pitchFamily="18" charset="0"/>
+                <a:ea typeface="Times New Roman" panose="02020603050405020304" pitchFamily="18" charset="0"/>
+              </a:rPr>
+              <a:t>V</a:t>
+            </a:r>
+            <a:r>
+              <a:rPr lang="en-US" dirty="0" err="1">
+                <a:effectLst/>
+                <a:latin typeface="Times New Roman" panose="02020603050405020304" pitchFamily="18" charset="0"/>
+                <a:ea typeface="Times New Roman" panose="02020603050405020304" pitchFamily="18" charset="0"/>
+              </a:rPr>
+              <a:t>ab</a:t>
+            </a:r>
+            <a:r>
+              <a:rPr lang="en-US" dirty="0">
+                <a:effectLst/>
+                <a:latin typeface="Times New Roman" panose="02020603050405020304" pitchFamily="18" charset="0"/>
+                <a:ea typeface="Times New Roman" panose="02020603050405020304" pitchFamily="18" charset="0"/>
+              </a:rPr>
+              <a:t> .</a:t>
+            </a:r>
+            <a:r>
+              <a:rPr lang="en-US" spc="-15" dirty="0">
+                <a:effectLst/>
+                <a:latin typeface="Times New Roman" panose="02020603050405020304" pitchFamily="18" charset="0"/>
+                <a:ea typeface="Times New Roman" panose="02020603050405020304" pitchFamily="18" charset="0"/>
+              </a:rPr>
+              <a:t> </a:t>
+            </a:r>
+            <a:r>
+              <a:rPr lang="en-US" dirty="0">
+                <a:effectLst/>
+                <a:latin typeface="Times New Roman" panose="02020603050405020304" pitchFamily="18" charset="0"/>
+                <a:ea typeface="Times New Roman" panose="02020603050405020304" pitchFamily="18" charset="0"/>
+              </a:rPr>
+              <a:t>Each</a:t>
+            </a:r>
+            <a:r>
+              <a:rPr lang="en-US" spc="-15" dirty="0">
+                <a:effectLst/>
+                <a:latin typeface="Times New Roman" panose="02020603050405020304" pitchFamily="18" charset="0"/>
+                <a:ea typeface="Times New Roman" panose="02020603050405020304" pitchFamily="18" charset="0"/>
+              </a:rPr>
+              <a:t> </a:t>
+            </a:r>
+            <a:r>
+              <a:rPr lang="en-US" dirty="0">
+                <a:effectLst/>
+                <a:latin typeface="Times New Roman" panose="02020603050405020304" pitchFamily="18" charset="0"/>
+                <a:ea typeface="Times New Roman" panose="02020603050405020304" pitchFamily="18" charset="0"/>
+              </a:rPr>
+              <a:t>capacitor</a:t>
+            </a:r>
+            <a:r>
+              <a:rPr lang="en-US" spc="-15" dirty="0">
+                <a:effectLst/>
+                <a:latin typeface="Times New Roman" panose="02020603050405020304" pitchFamily="18" charset="0"/>
+                <a:ea typeface="Times New Roman" panose="02020603050405020304" pitchFamily="18" charset="0"/>
+              </a:rPr>
+              <a:t> </a:t>
+            </a:r>
+            <a:r>
+              <a:rPr lang="en-US" dirty="0">
+                <a:effectLst/>
+                <a:latin typeface="Times New Roman" panose="02020603050405020304" pitchFamily="18" charset="0"/>
+                <a:ea typeface="Times New Roman" panose="02020603050405020304" pitchFamily="18" charset="0"/>
+              </a:rPr>
+              <a:t>has</a:t>
+            </a:r>
+            <a:r>
+              <a:rPr lang="en-US" spc="-15" dirty="0">
+                <a:effectLst/>
+                <a:latin typeface="Times New Roman" panose="02020603050405020304" pitchFamily="18" charset="0"/>
+                <a:ea typeface="Times New Roman" panose="02020603050405020304" pitchFamily="18" charset="0"/>
+              </a:rPr>
+              <a:t> </a:t>
+            </a:r>
+            <a:r>
+              <a:rPr lang="en-US" dirty="0">
+                <a:effectLst/>
+                <a:latin typeface="Times New Roman" panose="02020603050405020304" pitchFamily="18" charset="0"/>
+                <a:ea typeface="Times New Roman" panose="02020603050405020304" pitchFamily="18" charset="0"/>
+              </a:rPr>
+              <a:t>a capacitance of </a:t>
+            </a:r>
+            <a:r>
+              <a:rPr lang="en-US" dirty="0">
+                <a:effectLst/>
+                <a:latin typeface="Cambria Math" panose="02040503050406030204" pitchFamily="18" charset="0"/>
+                <a:ea typeface="Cambria Math" panose="02040503050406030204" pitchFamily="18" charset="0"/>
+              </a:rPr>
+              <a:t>50 𝜇F</a:t>
+            </a:r>
+            <a:r>
+              <a:rPr lang="en-US" dirty="0">
+                <a:effectLst/>
+                <a:latin typeface="Times New Roman" panose="02020603050405020304" pitchFamily="18" charset="0"/>
+                <a:ea typeface="Times New Roman" panose="02020603050405020304" pitchFamily="18" charset="0"/>
+              </a:rPr>
+              <a:t>. Calculate the charge on capacitor </a:t>
+            </a:r>
+            <a:r>
+              <a:rPr lang="en-US" dirty="0">
+                <a:effectLst/>
+                <a:latin typeface="Cambria Math" panose="02040503050406030204" pitchFamily="18" charset="0"/>
+                <a:ea typeface="Cambria Math" panose="02040503050406030204" pitchFamily="18" charset="0"/>
+              </a:rPr>
+              <a:t>𝐶</a:t>
+            </a:r>
+            <a:r>
+              <a:rPr lang="en-US" baseline="-25000" dirty="0">
+                <a:effectLst/>
+                <a:latin typeface="Cambria Math" panose="02040503050406030204" pitchFamily="18" charset="0"/>
+                <a:ea typeface="Cambria Math" panose="02040503050406030204" pitchFamily="18" charset="0"/>
+              </a:rPr>
+              <a:t>4</a:t>
+            </a:r>
+            <a:r>
+              <a:rPr lang="en-US" dirty="0">
+                <a:effectLst/>
+                <a:latin typeface="Times New Roman" panose="02020603050405020304" pitchFamily="18" charset="0"/>
+                <a:ea typeface="Times New Roman" panose="02020603050405020304" pitchFamily="18" charset="0"/>
+              </a:rPr>
+              <a:t>.</a:t>
+            </a:r>
+            <a:endParaRPr lang="en-MY" dirty="0">
+              <a:effectLst/>
+              <a:latin typeface="Times New Roman" panose="02020603050405020304" pitchFamily="18" charset="0"/>
+              <a:ea typeface="Times New Roman" panose="02020603050405020304" pitchFamily="18" charset="0"/>
+            </a:endParaRPr>
+          </a:p>
+          <a:p>
+            <a:pPr marR="12700" algn="r">
+              <a:spcBef>
+                <a:spcPts val="100"/>
+              </a:spcBef>
+              <a:buNone/>
+            </a:pPr>
+            <a:r>
+              <a:rPr lang="en-US" dirty="0">
+                <a:effectLst/>
+                <a:latin typeface="Times New Roman" panose="02020603050405020304" pitchFamily="18" charset="0"/>
+                <a:ea typeface="Times New Roman" panose="02020603050405020304" pitchFamily="18" charset="0"/>
+              </a:rPr>
+              <a:t>[4</a:t>
+            </a:r>
+            <a:r>
+              <a:rPr lang="en-US" spc="-5" dirty="0">
+                <a:effectLst/>
+                <a:latin typeface="Times New Roman" panose="02020603050405020304" pitchFamily="18" charset="0"/>
+                <a:ea typeface="Times New Roman" panose="02020603050405020304" pitchFamily="18" charset="0"/>
+              </a:rPr>
+              <a:t> </a:t>
+            </a:r>
+            <a:r>
+              <a:rPr lang="en-US" i="1" spc="-10" dirty="0">
+                <a:effectLst/>
+                <a:latin typeface="Times New Roman" panose="02020603050405020304" pitchFamily="18" charset="0"/>
+                <a:ea typeface="Times New Roman" panose="02020603050405020304" pitchFamily="18" charset="0"/>
+              </a:rPr>
+              <a:t>marks</a:t>
+            </a:r>
+            <a:r>
+              <a:rPr lang="en-US" spc="-10" dirty="0">
+                <a:effectLst/>
+                <a:latin typeface="Times New Roman" panose="02020603050405020304" pitchFamily="18" charset="0"/>
+                <a:ea typeface="Times New Roman" panose="02020603050405020304" pitchFamily="18" charset="0"/>
+              </a:rPr>
+              <a:t>]</a:t>
+            </a:r>
+            <a:endParaRPr lang="en-MY" dirty="0">
+              <a:effectLst/>
+              <a:latin typeface="Times New Roman" panose="02020603050405020304" pitchFamily="18" charset="0"/>
+              <a:ea typeface="Times New Roman" panose="02020603050405020304" pitchFamily="18" charset="0"/>
+            </a:endParaRPr>
+          </a:p>
+        </p:txBody>
+      </p:sp>
+      <p:pic>
+        <p:nvPicPr>
+          <p:cNvPr id="4" name="Picture 3">
+            <a:extLst>
+              <a:ext uri="{FF2B5EF4-FFF2-40B4-BE49-F238E27FC236}">
+                <a16:creationId xmlns:a16="http://schemas.microsoft.com/office/drawing/2014/main" id="{0A5960FB-79F3-38E3-EEA9-58855874D5BE}"/>
+              </a:ext>
+            </a:extLst>
+          </p:cNvPr>
+          <p:cNvPicPr>
+            <a:picLocks noChangeAspect="1"/>
+          </p:cNvPicPr>
+          <p:nvPr/>
+        </p:nvPicPr>
+        <p:blipFill>
+          <a:blip r:embed="rId2">
+            <a:extLst>
+              <a:ext uri="{28A0092B-C50C-407E-A947-70E740481C1C}">
+                <a14:useLocalDpi xmlns:a14="http://schemas.microsoft.com/office/drawing/2010/main" val="0"/>
+              </a:ext>
+            </a:extLst>
+          </a:blip>
+          <a:stretch>
+            <a:fillRect/>
+          </a:stretch>
+        </p:blipFill>
+        <p:spPr>
+          <a:xfrm>
+            <a:off x="368710" y="136422"/>
+            <a:ext cx="4931251" cy="2396613"/>
+          </a:xfrm>
+          <a:prstGeom prst="rect">
+            <a:avLst/>
+          </a:prstGeom>
+        </p:spPr>
+      </p:pic>
+      <p:sp>
+        <p:nvSpPr>
+          <p:cNvPr id="8" name="TextBox 7">
+            <a:extLst>
+              <a:ext uri="{FF2B5EF4-FFF2-40B4-BE49-F238E27FC236}">
+                <a16:creationId xmlns:a16="http://schemas.microsoft.com/office/drawing/2014/main" id="{FAFB871B-F59E-00D1-F246-5B0AE81473F2}"/>
+              </a:ext>
+            </a:extLst>
+          </p:cNvPr>
+          <p:cNvSpPr txBox="1"/>
+          <p:nvPr/>
+        </p:nvSpPr>
+        <p:spPr>
+          <a:xfrm>
+            <a:off x="5299961" y="2586002"/>
+            <a:ext cx="5799803" cy="1200329"/>
+          </a:xfrm>
+          <a:prstGeom prst="rect">
+            <a:avLst/>
+          </a:prstGeom>
+          <a:noFill/>
+        </p:spPr>
+        <p:txBody>
+          <a:bodyPr wrap="square">
+            <a:spAutoFit/>
+          </a:bodyPr>
+          <a:lstStyle/>
+          <a:p>
+            <a:r>
+              <a:rPr lang="en-US" b="1" dirty="0">
+                <a:effectLst/>
+                <a:latin typeface="Times New Roman" panose="02020603050405020304" pitchFamily="18" charset="0"/>
+                <a:ea typeface="Times New Roman" panose="02020603050405020304" pitchFamily="18" charset="0"/>
+              </a:rPr>
+              <a:t>(b) FIGURE 2.2 </a:t>
+            </a:r>
+            <a:r>
+              <a:rPr lang="en-US" dirty="0">
+                <a:effectLst/>
+                <a:latin typeface="Times New Roman" panose="02020603050405020304" pitchFamily="18" charset="0"/>
+                <a:ea typeface="Times New Roman" panose="02020603050405020304" pitchFamily="18" charset="0"/>
+              </a:rPr>
+              <a:t>shows an RC circuit where the battery is fully charged the capacitor. At </a:t>
+            </a:r>
+            <a:r>
+              <a:rPr lang="en-US" i="1" dirty="0">
+                <a:effectLst/>
+                <a:latin typeface="Times New Roman" panose="02020603050405020304" pitchFamily="18" charset="0"/>
+                <a:ea typeface="Times New Roman" panose="02020603050405020304" pitchFamily="18" charset="0"/>
+              </a:rPr>
+              <a:t>t </a:t>
+            </a:r>
+            <a:r>
+              <a:rPr lang="en-US" dirty="0">
+                <a:effectLst/>
+                <a:latin typeface="Times New Roman" panose="02020603050405020304" pitchFamily="18" charset="0"/>
+                <a:ea typeface="Times New Roman" panose="02020603050405020304" pitchFamily="18" charset="0"/>
+              </a:rPr>
+              <a:t>= 0 s, switch S is thrown from position </a:t>
+            </a:r>
+            <a:r>
+              <a:rPr lang="en-US" b="1" dirty="0">
+                <a:effectLst/>
+                <a:latin typeface="Times New Roman" panose="02020603050405020304" pitchFamily="18" charset="0"/>
+                <a:ea typeface="Times New Roman" panose="02020603050405020304" pitchFamily="18" charset="0"/>
+              </a:rPr>
+              <a:t>a </a:t>
+            </a:r>
+            <a:r>
+              <a:rPr lang="en-US" dirty="0">
+                <a:effectLst/>
+                <a:latin typeface="Times New Roman" panose="02020603050405020304" pitchFamily="18" charset="0"/>
+                <a:ea typeface="Times New Roman" panose="02020603050405020304" pitchFamily="18" charset="0"/>
+              </a:rPr>
+              <a:t>to </a:t>
+            </a:r>
+            <a:r>
+              <a:rPr lang="en-US" b="1" dirty="0">
+                <a:effectLst/>
+                <a:latin typeface="Times New Roman" panose="02020603050405020304" pitchFamily="18" charset="0"/>
+                <a:ea typeface="Times New Roman" panose="02020603050405020304" pitchFamily="18" charset="0"/>
+              </a:rPr>
+              <a:t>b</a:t>
+            </a:r>
+            <a:r>
+              <a:rPr lang="en-US" dirty="0">
+                <a:effectLst/>
+                <a:latin typeface="Times New Roman" panose="02020603050405020304" pitchFamily="18" charset="0"/>
+                <a:ea typeface="Times New Roman" panose="02020603050405020304" pitchFamily="18" charset="0"/>
+              </a:rPr>
+              <a:t>. The battery voltage</a:t>
+            </a:r>
+            <a:r>
+              <a:rPr lang="en-US" spc="-15" dirty="0">
+                <a:effectLst/>
+                <a:latin typeface="Times New Roman" panose="02020603050405020304" pitchFamily="18" charset="0"/>
+                <a:ea typeface="Times New Roman" panose="02020603050405020304" pitchFamily="18" charset="0"/>
+              </a:rPr>
+              <a:t> </a:t>
+            </a:r>
+            <a:r>
+              <a:rPr lang="en-US" dirty="0">
+                <a:effectLst/>
+                <a:latin typeface="Times New Roman" panose="02020603050405020304" pitchFamily="18" charset="0"/>
+                <a:ea typeface="Times New Roman" panose="02020603050405020304" pitchFamily="18" charset="0"/>
+              </a:rPr>
+              <a:t>is</a:t>
+            </a:r>
+            <a:r>
+              <a:rPr lang="en-US" spc="-15" dirty="0">
+                <a:effectLst/>
+                <a:latin typeface="Times New Roman" panose="02020603050405020304" pitchFamily="18" charset="0"/>
+                <a:ea typeface="Times New Roman" panose="02020603050405020304" pitchFamily="18" charset="0"/>
+              </a:rPr>
+              <a:t> </a:t>
+            </a:r>
+            <a:r>
+              <a:rPr lang="en-US" dirty="0">
+                <a:effectLst/>
+                <a:latin typeface="Times New Roman" panose="02020603050405020304" pitchFamily="18" charset="0"/>
+                <a:ea typeface="Times New Roman" panose="02020603050405020304" pitchFamily="18" charset="0"/>
+              </a:rPr>
+              <a:t>20.0</a:t>
+            </a:r>
+            <a:r>
+              <a:rPr lang="en-US" spc="-15" dirty="0">
+                <a:effectLst/>
+                <a:latin typeface="Times New Roman" panose="02020603050405020304" pitchFamily="18" charset="0"/>
+                <a:ea typeface="Times New Roman" panose="02020603050405020304" pitchFamily="18" charset="0"/>
+              </a:rPr>
+              <a:t> </a:t>
+            </a:r>
+            <a:r>
+              <a:rPr lang="en-US" dirty="0">
+                <a:effectLst/>
+                <a:latin typeface="Times New Roman" panose="02020603050405020304" pitchFamily="18" charset="0"/>
+                <a:ea typeface="Times New Roman" panose="02020603050405020304" pitchFamily="18" charset="0"/>
+              </a:rPr>
+              <a:t>V</a:t>
+            </a:r>
+            <a:r>
+              <a:rPr lang="en-US" spc="-15" dirty="0">
+                <a:effectLst/>
+                <a:latin typeface="Times New Roman" panose="02020603050405020304" pitchFamily="18" charset="0"/>
+                <a:ea typeface="Times New Roman" panose="02020603050405020304" pitchFamily="18" charset="0"/>
+              </a:rPr>
+              <a:t> </a:t>
+            </a:r>
+            <a:r>
+              <a:rPr lang="en-US" dirty="0">
+                <a:effectLst/>
+                <a:latin typeface="Times New Roman" panose="02020603050405020304" pitchFamily="18" charset="0"/>
+                <a:ea typeface="Times New Roman" panose="02020603050405020304" pitchFamily="18" charset="0"/>
+              </a:rPr>
+              <a:t>and</a:t>
+            </a:r>
+            <a:r>
+              <a:rPr lang="en-US" spc="-15" dirty="0">
+                <a:effectLst/>
+                <a:latin typeface="Times New Roman" panose="02020603050405020304" pitchFamily="18" charset="0"/>
+                <a:ea typeface="Times New Roman" panose="02020603050405020304" pitchFamily="18" charset="0"/>
+              </a:rPr>
+              <a:t> </a:t>
+            </a:r>
+            <a:r>
+              <a:rPr lang="en-US" dirty="0">
+                <a:effectLst/>
+                <a:latin typeface="Times New Roman" panose="02020603050405020304" pitchFamily="18" charset="0"/>
+                <a:ea typeface="Times New Roman" panose="02020603050405020304" pitchFamily="18" charset="0"/>
+              </a:rPr>
+              <a:t>the</a:t>
+            </a:r>
+            <a:r>
+              <a:rPr lang="en-US" spc="-10" dirty="0">
+                <a:effectLst/>
+                <a:latin typeface="Times New Roman" panose="02020603050405020304" pitchFamily="18" charset="0"/>
+                <a:ea typeface="Times New Roman" panose="02020603050405020304" pitchFamily="18" charset="0"/>
+              </a:rPr>
+              <a:t> </a:t>
+            </a:r>
+            <a:r>
+              <a:rPr lang="en-US" dirty="0">
+                <a:effectLst/>
+                <a:latin typeface="Times New Roman" panose="02020603050405020304" pitchFamily="18" charset="0"/>
+                <a:ea typeface="Times New Roman" panose="02020603050405020304" pitchFamily="18" charset="0"/>
+              </a:rPr>
+              <a:t>resistance</a:t>
+            </a:r>
+            <a:r>
+              <a:rPr lang="en-US" spc="-15" dirty="0">
+                <a:effectLst/>
+                <a:latin typeface="Times New Roman" panose="02020603050405020304" pitchFamily="18" charset="0"/>
+                <a:ea typeface="Times New Roman" panose="02020603050405020304" pitchFamily="18" charset="0"/>
+              </a:rPr>
+              <a:t> </a:t>
+            </a:r>
+            <a:r>
+              <a:rPr lang="en-US" dirty="0">
+                <a:effectLst/>
+                <a:latin typeface="Times New Roman" panose="02020603050405020304" pitchFamily="18" charset="0"/>
+                <a:ea typeface="Times New Roman" panose="02020603050405020304" pitchFamily="18" charset="0"/>
+              </a:rPr>
+              <a:t>of</a:t>
+            </a:r>
+            <a:r>
+              <a:rPr lang="en-US" spc="-15" dirty="0">
+                <a:effectLst/>
+                <a:latin typeface="Times New Roman" panose="02020603050405020304" pitchFamily="18" charset="0"/>
+                <a:ea typeface="Times New Roman" panose="02020603050405020304" pitchFamily="18" charset="0"/>
+              </a:rPr>
+              <a:t> </a:t>
+            </a:r>
+            <a:r>
+              <a:rPr lang="en-US" dirty="0">
+                <a:effectLst/>
+                <a:latin typeface="Times New Roman" panose="02020603050405020304" pitchFamily="18" charset="0"/>
+                <a:ea typeface="Times New Roman" panose="02020603050405020304" pitchFamily="18" charset="0"/>
+              </a:rPr>
+              <a:t>resistor,</a:t>
+            </a:r>
+            <a:r>
+              <a:rPr lang="en-US" spc="-5" dirty="0">
+                <a:effectLst/>
+                <a:latin typeface="Times New Roman" panose="02020603050405020304" pitchFamily="18" charset="0"/>
+                <a:ea typeface="Times New Roman" panose="02020603050405020304" pitchFamily="18" charset="0"/>
+              </a:rPr>
+              <a:t> </a:t>
+            </a:r>
+            <a:r>
+              <a:rPr lang="en-US" i="1" dirty="0">
+                <a:effectLst/>
+                <a:latin typeface="Times New Roman" panose="02020603050405020304" pitchFamily="18" charset="0"/>
+                <a:ea typeface="Times New Roman" panose="02020603050405020304" pitchFamily="18" charset="0"/>
+              </a:rPr>
+              <a:t>R</a:t>
+            </a:r>
+            <a:r>
+              <a:rPr lang="en-US" i="1" spc="-15" dirty="0">
+                <a:effectLst/>
+                <a:latin typeface="Times New Roman" panose="02020603050405020304" pitchFamily="18" charset="0"/>
+                <a:ea typeface="Times New Roman" panose="02020603050405020304" pitchFamily="18" charset="0"/>
+              </a:rPr>
+              <a:t> </a:t>
+            </a:r>
+            <a:r>
+              <a:rPr lang="en-US" dirty="0">
+                <a:effectLst/>
+                <a:latin typeface="Times New Roman" panose="02020603050405020304" pitchFamily="18" charset="0"/>
+                <a:ea typeface="Times New Roman" panose="02020603050405020304" pitchFamily="18" charset="0"/>
+              </a:rPr>
+              <a:t>is</a:t>
+            </a:r>
+            <a:r>
+              <a:rPr lang="en-US" spc="-15" dirty="0">
+                <a:effectLst/>
+                <a:latin typeface="Times New Roman" panose="02020603050405020304" pitchFamily="18" charset="0"/>
+                <a:ea typeface="Times New Roman" panose="02020603050405020304" pitchFamily="18" charset="0"/>
+              </a:rPr>
+              <a:t> </a:t>
+            </a:r>
+            <a:r>
+              <a:rPr lang="en-US" dirty="0">
+                <a:effectLst/>
+                <a:latin typeface="Times New Roman" panose="02020603050405020304" pitchFamily="18" charset="0"/>
+                <a:ea typeface="Times New Roman" panose="02020603050405020304" pitchFamily="18" charset="0"/>
+              </a:rPr>
+              <a:t>60</a:t>
+            </a:r>
+            <a:r>
+              <a:rPr lang="en-US" spc="-15" dirty="0">
+                <a:effectLst/>
+                <a:latin typeface="Times New Roman" panose="02020603050405020304" pitchFamily="18" charset="0"/>
+                <a:ea typeface="Times New Roman" panose="02020603050405020304" pitchFamily="18" charset="0"/>
+              </a:rPr>
+              <a:t> </a:t>
+            </a:r>
+            <a:r>
+              <a:rPr lang="en-US" dirty="0">
+                <a:effectLst/>
+                <a:latin typeface="Cambria Math" panose="02040503050406030204" pitchFamily="18" charset="0"/>
+                <a:ea typeface="Times New Roman" panose="02020603050405020304" pitchFamily="18" charset="0"/>
+                <a:cs typeface="Times New Roman" panose="02020603050405020304" pitchFamily="18" charset="0"/>
+              </a:rPr>
+              <a:t>Ω</a:t>
+            </a:r>
+            <a:r>
+              <a:rPr lang="en-US" dirty="0">
+                <a:effectLst/>
+                <a:latin typeface="Times New Roman" panose="02020603050405020304" pitchFamily="18" charset="0"/>
+                <a:ea typeface="Times New Roman" panose="02020603050405020304" pitchFamily="18" charset="0"/>
+              </a:rPr>
+              <a:t>.</a:t>
+            </a:r>
+            <a:r>
+              <a:rPr lang="en-US" spc="-15" dirty="0">
+                <a:effectLst/>
+                <a:latin typeface="Times New Roman" panose="02020603050405020304" pitchFamily="18" charset="0"/>
+                <a:ea typeface="Times New Roman" panose="02020603050405020304" pitchFamily="18" charset="0"/>
+              </a:rPr>
+              <a:t> </a:t>
+            </a:r>
+            <a:r>
+              <a:rPr lang="en-US" dirty="0">
+                <a:effectLst/>
+                <a:latin typeface="Times New Roman" panose="02020603050405020304" pitchFamily="18" charset="0"/>
+                <a:ea typeface="Times New Roman" panose="02020603050405020304" pitchFamily="18" charset="0"/>
+              </a:rPr>
+              <a:t>The</a:t>
+            </a:r>
+            <a:r>
+              <a:rPr lang="en-US" spc="-20" dirty="0">
+                <a:effectLst/>
+                <a:latin typeface="Times New Roman" panose="02020603050405020304" pitchFamily="18" charset="0"/>
+                <a:ea typeface="Times New Roman" panose="02020603050405020304" pitchFamily="18" charset="0"/>
+              </a:rPr>
+              <a:t> </a:t>
+            </a:r>
+            <a:r>
+              <a:rPr lang="en-US" dirty="0">
+                <a:effectLst/>
+                <a:latin typeface="Times New Roman" panose="02020603050405020304" pitchFamily="18" charset="0"/>
+                <a:ea typeface="Times New Roman" panose="02020603050405020304" pitchFamily="18" charset="0"/>
+              </a:rPr>
+              <a:t>time</a:t>
+            </a:r>
+            <a:r>
+              <a:rPr lang="en-US" spc="-15" dirty="0">
+                <a:effectLst/>
+                <a:latin typeface="Times New Roman" panose="02020603050405020304" pitchFamily="18" charset="0"/>
+                <a:ea typeface="Times New Roman" panose="02020603050405020304" pitchFamily="18" charset="0"/>
+              </a:rPr>
+              <a:t> </a:t>
+            </a:r>
+            <a:r>
+              <a:rPr lang="en-US" dirty="0">
+                <a:effectLst/>
+                <a:latin typeface="Times New Roman" panose="02020603050405020304" pitchFamily="18" charset="0"/>
+                <a:ea typeface="Times New Roman" panose="02020603050405020304" pitchFamily="18" charset="0"/>
+              </a:rPr>
+              <a:t>constant</a:t>
+            </a:r>
+            <a:r>
+              <a:rPr lang="en-US" spc="-15" dirty="0">
+                <a:effectLst/>
+                <a:latin typeface="Times New Roman" panose="02020603050405020304" pitchFamily="18" charset="0"/>
+                <a:ea typeface="Times New Roman" panose="02020603050405020304" pitchFamily="18" charset="0"/>
+              </a:rPr>
+              <a:t> </a:t>
+            </a:r>
+            <a:r>
+              <a:rPr lang="en-US" dirty="0">
+                <a:effectLst/>
+                <a:latin typeface="Times New Roman" panose="02020603050405020304" pitchFamily="18" charset="0"/>
+                <a:ea typeface="Times New Roman" panose="02020603050405020304" pitchFamily="18" charset="0"/>
+              </a:rPr>
+              <a:t>is 60 </a:t>
+            </a:r>
+            <a:r>
+              <a:rPr lang="en-US" dirty="0" err="1">
+                <a:effectLst/>
+                <a:latin typeface="Symbol" panose="05050102010706020507" pitchFamily="18" charset="2"/>
+                <a:ea typeface="Times New Roman" panose="02020603050405020304" pitchFamily="18" charset="0"/>
+                <a:cs typeface="Times New Roman" panose="02020603050405020304" pitchFamily="18" charset="0"/>
+              </a:rPr>
+              <a:t>m</a:t>
+            </a:r>
+            <a:r>
+              <a:rPr lang="en-US" dirty="0" err="1">
+                <a:effectLst/>
+                <a:latin typeface="Times New Roman" panose="02020603050405020304" pitchFamily="18" charset="0"/>
+                <a:ea typeface="Times New Roman" panose="02020603050405020304" pitchFamily="18" charset="0"/>
+              </a:rPr>
+              <a:t>s.</a:t>
+            </a:r>
+            <a:endParaRPr lang="en-MY" dirty="0"/>
+          </a:p>
+        </p:txBody>
+      </p:sp>
+      <p:pic>
+        <p:nvPicPr>
+          <p:cNvPr id="9" name="Image 138">
+            <a:extLst>
+              <a:ext uri="{FF2B5EF4-FFF2-40B4-BE49-F238E27FC236}">
+                <a16:creationId xmlns:a16="http://schemas.microsoft.com/office/drawing/2014/main" id="{B8915721-8C2A-CF78-66C2-EF2A7D5F89FF}"/>
+              </a:ext>
+            </a:extLst>
+          </p:cNvPr>
+          <p:cNvPicPr>
+            <a:picLocks/>
+          </p:cNvPicPr>
+          <p:nvPr/>
+        </p:nvPicPr>
+        <p:blipFill>
+          <a:blip r:embed="rId3" cstate="print"/>
+          <a:stretch>
+            <a:fillRect/>
+          </a:stretch>
+        </p:blipFill>
+        <p:spPr>
+          <a:xfrm>
+            <a:off x="124133" y="3181844"/>
+            <a:ext cx="4503174" cy="2286243"/>
+          </a:xfrm>
+          <a:prstGeom prst="rect">
+            <a:avLst/>
+          </a:prstGeom>
+        </p:spPr>
+      </p:pic>
+      <p:sp>
+        <p:nvSpPr>
+          <p:cNvPr id="11" name="TextBox 10">
+            <a:extLst>
+              <a:ext uri="{FF2B5EF4-FFF2-40B4-BE49-F238E27FC236}">
+                <a16:creationId xmlns:a16="http://schemas.microsoft.com/office/drawing/2014/main" id="{C74C5F7A-986C-EA80-0A4C-C955A3BB39B7}"/>
+              </a:ext>
+            </a:extLst>
+          </p:cNvPr>
+          <p:cNvSpPr txBox="1"/>
+          <p:nvPr/>
+        </p:nvSpPr>
+        <p:spPr>
+          <a:xfrm>
+            <a:off x="5299961" y="3839298"/>
+            <a:ext cx="6098458" cy="1836400"/>
+          </a:xfrm>
+          <a:prstGeom prst="rect">
+            <a:avLst/>
+          </a:prstGeom>
+          <a:noFill/>
+        </p:spPr>
+        <p:txBody>
+          <a:bodyPr wrap="square">
+            <a:spAutoFit/>
+          </a:bodyPr>
+          <a:lstStyle/>
+          <a:p>
+            <a:pPr marR="12700">
+              <a:spcBef>
+                <a:spcPts val="100"/>
+              </a:spcBef>
+              <a:buNone/>
+            </a:pPr>
+            <a:r>
+              <a:rPr lang="en-US" dirty="0">
+                <a:effectLst/>
+                <a:latin typeface="Times New Roman" panose="02020603050405020304" pitchFamily="18" charset="0"/>
+                <a:ea typeface="Times New Roman" panose="02020603050405020304" pitchFamily="18" charset="0"/>
+              </a:rPr>
+              <a:t>Determine</a:t>
+            </a:r>
+            <a:endParaRPr lang="en-MY" dirty="0">
+              <a:effectLst/>
+              <a:latin typeface="Times New Roman" panose="02020603050405020304" pitchFamily="18" charset="0"/>
+              <a:ea typeface="Times New Roman" panose="02020603050405020304" pitchFamily="18" charset="0"/>
+            </a:endParaRPr>
+          </a:p>
+          <a:p>
+            <a:pPr marL="342900" lvl="0" indent="-342900">
+              <a:lnSpc>
+                <a:spcPts val="1375"/>
+              </a:lnSpc>
+              <a:buSzPts val="1200"/>
+              <a:buFont typeface="Times New Roman" panose="02020603050405020304" pitchFamily="18" charset="0"/>
+              <a:buAutoNum type="romanLcParenBoth"/>
+              <a:tabLst>
+                <a:tab pos="1458595" algn="l"/>
+              </a:tabLst>
+            </a:pPr>
+            <a:r>
+              <a:rPr lang="en-US" spc="0" dirty="0">
+                <a:effectLst/>
+                <a:latin typeface="Times New Roman" panose="02020603050405020304" pitchFamily="18" charset="0"/>
+                <a:ea typeface="Times New Roman" panose="02020603050405020304" pitchFamily="18" charset="0"/>
+              </a:rPr>
+              <a:t>the</a:t>
+            </a:r>
+            <a:r>
+              <a:rPr lang="en-US" spc="-15" dirty="0">
+                <a:effectLst/>
+                <a:latin typeface="Times New Roman" panose="02020603050405020304" pitchFamily="18" charset="0"/>
+                <a:ea typeface="Times New Roman" panose="02020603050405020304" pitchFamily="18" charset="0"/>
+              </a:rPr>
+              <a:t> </a:t>
+            </a:r>
+            <a:r>
+              <a:rPr lang="en-US" spc="0" dirty="0">
+                <a:effectLst/>
+                <a:latin typeface="Times New Roman" panose="02020603050405020304" pitchFamily="18" charset="0"/>
+                <a:ea typeface="Times New Roman" panose="02020603050405020304" pitchFamily="18" charset="0"/>
+              </a:rPr>
+              <a:t>capacitance</a:t>
+            </a:r>
+            <a:r>
+              <a:rPr lang="en-US" spc="-15" dirty="0">
+                <a:effectLst/>
+                <a:latin typeface="Times New Roman" panose="02020603050405020304" pitchFamily="18" charset="0"/>
+                <a:ea typeface="Times New Roman" panose="02020603050405020304" pitchFamily="18" charset="0"/>
+              </a:rPr>
+              <a:t> </a:t>
+            </a:r>
+            <a:r>
+              <a:rPr lang="en-US" i="1" spc="-25" dirty="0">
+                <a:effectLst/>
+                <a:latin typeface="Times New Roman" panose="02020603050405020304" pitchFamily="18" charset="0"/>
+                <a:ea typeface="Times New Roman" panose="02020603050405020304" pitchFamily="18" charset="0"/>
+              </a:rPr>
+              <a:t>C</a:t>
+            </a:r>
+            <a:r>
+              <a:rPr lang="en-US" spc="-25" dirty="0">
+                <a:effectLst/>
+                <a:latin typeface="Times New Roman" panose="02020603050405020304" pitchFamily="18" charset="0"/>
+                <a:ea typeface="Times New Roman" panose="02020603050405020304" pitchFamily="18" charset="0"/>
+              </a:rPr>
+              <a:t>.</a:t>
+            </a:r>
+            <a:endParaRPr lang="en-MY" spc="0" dirty="0">
+              <a:effectLst/>
+              <a:latin typeface="Times New Roman" panose="02020603050405020304" pitchFamily="18" charset="0"/>
+              <a:ea typeface="Times New Roman" panose="02020603050405020304" pitchFamily="18" charset="0"/>
+            </a:endParaRPr>
+          </a:p>
+          <a:p>
+            <a:pPr marL="342900" lvl="0" indent="-342900">
+              <a:spcBef>
+                <a:spcPts val="695"/>
+              </a:spcBef>
+              <a:buSzPts val="1200"/>
+              <a:buFont typeface="Times New Roman" panose="02020603050405020304" pitchFamily="18" charset="0"/>
+              <a:buAutoNum type="romanLcParenBoth"/>
+              <a:tabLst>
+                <a:tab pos="1458595" algn="l"/>
+              </a:tabLst>
+            </a:pPr>
+            <a:r>
+              <a:rPr lang="en-US" spc="0" dirty="0">
+                <a:effectLst/>
+                <a:latin typeface="Times New Roman" panose="02020603050405020304" pitchFamily="18" charset="0"/>
+                <a:ea typeface="Times New Roman" panose="02020603050405020304" pitchFamily="18" charset="0"/>
+              </a:rPr>
+              <a:t>the</a:t>
+            </a:r>
+            <a:r>
+              <a:rPr lang="en-US" spc="-15" dirty="0">
+                <a:effectLst/>
+                <a:latin typeface="Times New Roman" panose="02020603050405020304" pitchFamily="18" charset="0"/>
+                <a:ea typeface="Times New Roman" panose="02020603050405020304" pitchFamily="18" charset="0"/>
+              </a:rPr>
+              <a:t> </a:t>
+            </a:r>
+            <a:r>
+              <a:rPr lang="en-US" spc="0" dirty="0">
+                <a:effectLst/>
+                <a:latin typeface="Times New Roman" panose="02020603050405020304" pitchFamily="18" charset="0"/>
+                <a:ea typeface="Times New Roman" panose="02020603050405020304" pitchFamily="18" charset="0"/>
+              </a:rPr>
+              <a:t>value of</a:t>
+            </a:r>
+            <a:r>
+              <a:rPr lang="en-US" spc="-15" dirty="0">
+                <a:effectLst/>
+                <a:latin typeface="Times New Roman" panose="02020603050405020304" pitchFamily="18" charset="0"/>
+                <a:ea typeface="Times New Roman" panose="02020603050405020304" pitchFamily="18" charset="0"/>
+              </a:rPr>
+              <a:t> </a:t>
+            </a:r>
+            <a:r>
+              <a:rPr lang="en-US" spc="0" dirty="0">
+                <a:effectLst/>
+                <a:latin typeface="Times New Roman" panose="02020603050405020304" pitchFamily="18" charset="0"/>
+                <a:ea typeface="Times New Roman" panose="02020603050405020304" pitchFamily="18" charset="0"/>
+              </a:rPr>
+              <a:t>the</a:t>
+            </a:r>
+            <a:r>
+              <a:rPr lang="en-US" spc="10" dirty="0">
+                <a:effectLst/>
+                <a:latin typeface="Times New Roman" panose="02020603050405020304" pitchFamily="18" charset="0"/>
+                <a:ea typeface="Times New Roman" panose="02020603050405020304" pitchFamily="18" charset="0"/>
+              </a:rPr>
+              <a:t> </a:t>
+            </a:r>
+            <a:r>
+              <a:rPr lang="en-US" spc="0" dirty="0">
+                <a:effectLst/>
+                <a:latin typeface="Times New Roman" panose="02020603050405020304" pitchFamily="18" charset="0"/>
+                <a:ea typeface="Times New Roman" panose="02020603050405020304" pitchFamily="18" charset="0"/>
+              </a:rPr>
+              <a:t>charge</a:t>
+            </a:r>
+            <a:r>
+              <a:rPr lang="en-US" spc="-10" dirty="0">
+                <a:effectLst/>
+                <a:latin typeface="Times New Roman" panose="02020603050405020304" pitchFamily="18" charset="0"/>
+                <a:ea typeface="Times New Roman" panose="02020603050405020304" pitchFamily="18" charset="0"/>
+              </a:rPr>
+              <a:t> </a:t>
+            </a:r>
+            <a:r>
+              <a:rPr lang="en-US" spc="0" dirty="0">
+                <a:effectLst/>
+                <a:latin typeface="Times New Roman" panose="02020603050405020304" pitchFamily="18" charset="0"/>
+                <a:ea typeface="Times New Roman" panose="02020603050405020304" pitchFamily="18" charset="0"/>
+              </a:rPr>
+              <a:t>on the</a:t>
+            </a:r>
+            <a:r>
+              <a:rPr lang="en-US" spc="-5" dirty="0">
+                <a:effectLst/>
+                <a:latin typeface="Times New Roman" panose="02020603050405020304" pitchFamily="18" charset="0"/>
+                <a:ea typeface="Times New Roman" panose="02020603050405020304" pitchFamily="18" charset="0"/>
+              </a:rPr>
+              <a:t> </a:t>
+            </a:r>
+            <a:r>
+              <a:rPr lang="en-US" spc="0" dirty="0">
+                <a:effectLst/>
+                <a:latin typeface="Times New Roman" panose="02020603050405020304" pitchFamily="18" charset="0"/>
+                <a:ea typeface="Times New Roman" panose="02020603050405020304" pitchFamily="18" charset="0"/>
+              </a:rPr>
+              <a:t>capacitor at</a:t>
+            </a:r>
+            <a:r>
+              <a:rPr lang="en-US" spc="-5" dirty="0">
+                <a:effectLst/>
+                <a:latin typeface="Times New Roman" panose="02020603050405020304" pitchFamily="18" charset="0"/>
+                <a:ea typeface="Times New Roman" panose="02020603050405020304" pitchFamily="18" charset="0"/>
+              </a:rPr>
+              <a:t> </a:t>
+            </a:r>
+            <a:r>
+              <a:rPr lang="en-US" spc="0" dirty="0">
+                <a:effectLst/>
+                <a:latin typeface="Times New Roman" panose="02020603050405020304" pitchFamily="18" charset="0"/>
+                <a:ea typeface="Times New Roman" panose="02020603050405020304" pitchFamily="18" charset="0"/>
+              </a:rPr>
+              <a:t>t =</a:t>
+            </a:r>
+            <a:r>
+              <a:rPr lang="en-US" spc="-10" dirty="0">
+                <a:effectLst/>
+                <a:latin typeface="Times New Roman" panose="02020603050405020304" pitchFamily="18" charset="0"/>
+                <a:ea typeface="Times New Roman" panose="02020603050405020304" pitchFamily="18" charset="0"/>
+              </a:rPr>
+              <a:t> </a:t>
+            </a:r>
+            <a:r>
+              <a:rPr lang="en-US" spc="0" dirty="0">
+                <a:effectLst/>
+                <a:latin typeface="Times New Roman" panose="02020603050405020304" pitchFamily="18" charset="0"/>
+                <a:ea typeface="Times New Roman" panose="02020603050405020304" pitchFamily="18" charset="0"/>
+              </a:rPr>
+              <a:t>0</a:t>
+            </a:r>
+            <a:r>
+              <a:rPr lang="en-US" spc="10" dirty="0">
+                <a:effectLst/>
+                <a:latin typeface="Times New Roman" panose="02020603050405020304" pitchFamily="18" charset="0"/>
+                <a:ea typeface="Times New Roman" panose="02020603050405020304" pitchFamily="18" charset="0"/>
+              </a:rPr>
+              <a:t> </a:t>
+            </a:r>
+            <a:r>
+              <a:rPr lang="en-US" spc="-25" dirty="0">
+                <a:effectLst/>
+                <a:latin typeface="Times New Roman" panose="02020603050405020304" pitchFamily="18" charset="0"/>
+                <a:ea typeface="Times New Roman" panose="02020603050405020304" pitchFamily="18" charset="0"/>
+              </a:rPr>
+              <a:t>s.</a:t>
+            </a:r>
+            <a:endParaRPr lang="en-MY" spc="0" dirty="0">
+              <a:effectLst/>
+              <a:latin typeface="Times New Roman" panose="02020603050405020304" pitchFamily="18" charset="0"/>
+              <a:ea typeface="Times New Roman" panose="02020603050405020304" pitchFamily="18" charset="0"/>
+            </a:endParaRPr>
+          </a:p>
+          <a:p>
+            <a:pPr marL="342900" lvl="0" indent="-342900">
+              <a:spcBef>
+                <a:spcPts val="685"/>
+              </a:spcBef>
+              <a:buSzPts val="1200"/>
+              <a:buFont typeface="Times New Roman" panose="02020603050405020304" pitchFamily="18" charset="0"/>
+              <a:buAutoNum type="romanLcParenBoth"/>
+              <a:tabLst>
+                <a:tab pos="1458595" algn="l"/>
+              </a:tabLst>
+            </a:pPr>
+            <a:r>
+              <a:rPr lang="en-US" spc="0" dirty="0">
+                <a:effectLst/>
+                <a:latin typeface="Times New Roman" panose="02020603050405020304" pitchFamily="18" charset="0"/>
+                <a:ea typeface="Times New Roman" panose="02020603050405020304" pitchFamily="18" charset="0"/>
+              </a:rPr>
+              <a:t>the</a:t>
+            </a:r>
+            <a:r>
+              <a:rPr lang="en-US" spc="-10" dirty="0">
+                <a:effectLst/>
+                <a:latin typeface="Times New Roman" panose="02020603050405020304" pitchFamily="18" charset="0"/>
+                <a:ea typeface="Times New Roman" panose="02020603050405020304" pitchFamily="18" charset="0"/>
+              </a:rPr>
+              <a:t> </a:t>
+            </a:r>
+            <a:r>
+              <a:rPr lang="en-US" spc="0" dirty="0">
+                <a:effectLst/>
+                <a:latin typeface="Times New Roman" panose="02020603050405020304" pitchFamily="18" charset="0"/>
+                <a:ea typeface="Times New Roman" panose="02020603050405020304" pitchFamily="18" charset="0"/>
+              </a:rPr>
+              <a:t>value of</a:t>
+            </a:r>
+            <a:r>
+              <a:rPr lang="en-US" spc="-10" dirty="0">
+                <a:effectLst/>
+                <a:latin typeface="Times New Roman" panose="02020603050405020304" pitchFamily="18" charset="0"/>
+                <a:ea typeface="Times New Roman" panose="02020603050405020304" pitchFamily="18" charset="0"/>
+              </a:rPr>
+              <a:t> </a:t>
+            </a:r>
+            <a:r>
+              <a:rPr lang="en-US" spc="0" dirty="0">
+                <a:effectLst/>
+                <a:latin typeface="Times New Roman" panose="02020603050405020304" pitchFamily="18" charset="0"/>
+                <a:ea typeface="Times New Roman" panose="02020603050405020304" pitchFamily="18" charset="0"/>
+              </a:rPr>
+              <a:t>the</a:t>
+            </a:r>
+            <a:r>
+              <a:rPr lang="en-US" spc="5" dirty="0">
+                <a:effectLst/>
+                <a:latin typeface="Times New Roman" panose="02020603050405020304" pitchFamily="18" charset="0"/>
+                <a:ea typeface="Times New Roman" panose="02020603050405020304" pitchFamily="18" charset="0"/>
+              </a:rPr>
+              <a:t> </a:t>
+            </a:r>
+            <a:r>
+              <a:rPr lang="en-US" spc="0" dirty="0">
+                <a:effectLst/>
+                <a:latin typeface="Times New Roman" panose="02020603050405020304" pitchFamily="18" charset="0"/>
+                <a:ea typeface="Times New Roman" panose="02020603050405020304" pitchFamily="18" charset="0"/>
+              </a:rPr>
+              <a:t>charge</a:t>
+            </a:r>
+            <a:r>
+              <a:rPr lang="en-US" spc="-5" dirty="0">
+                <a:effectLst/>
+                <a:latin typeface="Times New Roman" panose="02020603050405020304" pitchFamily="18" charset="0"/>
+                <a:ea typeface="Times New Roman" panose="02020603050405020304" pitchFamily="18" charset="0"/>
+              </a:rPr>
+              <a:t> </a:t>
+            </a:r>
+            <a:r>
+              <a:rPr lang="en-US" spc="0" dirty="0">
+                <a:effectLst/>
+                <a:latin typeface="Times New Roman" panose="02020603050405020304" pitchFamily="18" charset="0"/>
+                <a:ea typeface="Times New Roman" panose="02020603050405020304" pitchFamily="18" charset="0"/>
+              </a:rPr>
+              <a:t>at</a:t>
+            </a:r>
+            <a:r>
+              <a:rPr lang="en-US" spc="15" dirty="0">
+                <a:effectLst/>
+                <a:latin typeface="Times New Roman" panose="02020603050405020304" pitchFamily="18" charset="0"/>
+                <a:ea typeface="Times New Roman" panose="02020603050405020304" pitchFamily="18" charset="0"/>
+              </a:rPr>
+              <a:t> </a:t>
+            </a:r>
+            <a:r>
+              <a:rPr lang="en-US" i="1" spc="0" dirty="0">
+                <a:effectLst/>
+                <a:latin typeface="Times New Roman" panose="02020603050405020304" pitchFamily="18" charset="0"/>
+                <a:ea typeface="Times New Roman" panose="02020603050405020304" pitchFamily="18" charset="0"/>
+              </a:rPr>
+              <a:t>t</a:t>
+            </a:r>
+            <a:r>
+              <a:rPr lang="en-US" i="1" spc="-5" dirty="0">
+                <a:effectLst/>
+                <a:latin typeface="Times New Roman" panose="02020603050405020304" pitchFamily="18" charset="0"/>
+                <a:ea typeface="Times New Roman" panose="02020603050405020304" pitchFamily="18" charset="0"/>
+              </a:rPr>
+              <a:t> </a:t>
+            </a:r>
+            <a:r>
+              <a:rPr lang="en-US" spc="0" dirty="0">
+                <a:effectLst/>
+                <a:latin typeface="Times New Roman" panose="02020603050405020304" pitchFamily="18" charset="0"/>
+                <a:ea typeface="Times New Roman" panose="02020603050405020304" pitchFamily="18" charset="0"/>
+              </a:rPr>
+              <a:t>=</a:t>
+            </a:r>
+            <a:r>
+              <a:rPr lang="en-US" spc="-5" dirty="0">
+                <a:effectLst/>
+                <a:latin typeface="Times New Roman" panose="02020603050405020304" pitchFamily="18" charset="0"/>
+                <a:ea typeface="Times New Roman" panose="02020603050405020304" pitchFamily="18" charset="0"/>
+              </a:rPr>
+              <a:t> </a:t>
+            </a:r>
+            <a:r>
+              <a:rPr lang="en-US" spc="0" dirty="0">
+                <a:effectLst/>
+                <a:latin typeface="Times New Roman" panose="02020603050405020304" pitchFamily="18" charset="0"/>
+                <a:ea typeface="Times New Roman" panose="02020603050405020304" pitchFamily="18" charset="0"/>
+              </a:rPr>
+              <a:t>50 </a:t>
+            </a:r>
+            <a:r>
+              <a:rPr lang="en-US" spc="-25" dirty="0" err="1">
+                <a:effectLst/>
+                <a:latin typeface="Symbol" panose="05050102010706020507" pitchFamily="18" charset="2"/>
+                <a:ea typeface="Times New Roman" panose="02020603050405020304" pitchFamily="18" charset="0"/>
+              </a:rPr>
+              <a:t>m</a:t>
+            </a:r>
+            <a:r>
+              <a:rPr lang="en-US" spc="-25" dirty="0" err="1">
+                <a:effectLst/>
+                <a:latin typeface="Times New Roman" panose="02020603050405020304" pitchFamily="18" charset="0"/>
+                <a:ea typeface="Times New Roman" panose="02020603050405020304" pitchFamily="18" charset="0"/>
+              </a:rPr>
+              <a:t>s</a:t>
+            </a:r>
+            <a:endParaRPr lang="en-MY" spc="0" dirty="0">
+              <a:effectLst/>
+              <a:latin typeface="Times New Roman" panose="02020603050405020304" pitchFamily="18" charset="0"/>
+              <a:ea typeface="Times New Roman" panose="02020603050405020304" pitchFamily="18" charset="0"/>
+            </a:endParaRPr>
+          </a:p>
+          <a:p>
+            <a:pPr>
+              <a:buNone/>
+            </a:pPr>
+            <a:r>
+              <a:rPr lang="en-US" dirty="0">
+                <a:effectLst/>
+                <a:latin typeface="Times New Roman" panose="02020603050405020304" pitchFamily="18" charset="0"/>
+                <a:ea typeface="Times New Roman" panose="02020603050405020304" pitchFamily="18" charset="0"/>
+              </a:rPr>
+              <a:t> </a:t>
+            </a:r>
+            <a:endParaRPr lang="en-MY" dirty="0">
+              <a:effectLst/>
+              <a:latin typeface="Times New Roman" panose="02020603050405020304" pitchFamily="18" charset="0"/>
+              <a:ea typeface="Times New Roman" panose="02020603050405020304" pitchFamily="18" charset="0"/>
+            </a:endParaRPr>
+          </a:p>
+          <a:p>
+            <a:pPr marR="12700" algn="r">
+              <a:buNone/>
+            </a:pPr>
+            <a:r>
+              <a:rPr lang="en-US" dirty="0">
+                <a:effectLst/>
+                <a:latin typeface="Times New Roman" panose="02020603050405020304" pitchFamily="18" charset="0"/>
+                <a:ea typeface="Times New Roman" panose="02020603050405020304" pitchFamily="18" charset="0"/>
+              </a:rPr>
+              <a:t>[3</a:t>
+            </a:r>
+            <a:r>
+              <a:rPr lang="en-US" spc="-5" dirty="0">
+                <a:effectLst/>
+                <a:latin typeface="Times New Roman" panose="02020603050405020304" pitchFamily="18" charset="0"/>
+                <a:ea typeface="Times New Roman" panose="02020603050405020304" pitchFamily="18" charset="0"/>
+              </a:rPr>
+              <a:t> </a:t>
+            </a:r>
+            <a:r>
+              <a:rPr lang="en-US" i="1" spc="-10" dirty="0">
+                <a:effectLst/>
+                <a:latin typeface="Times New Roman" panose="02020603050405020304" pitchFamily="18" charset="0"/>
+                <a:ea typeface="Times New Roman" panose="02020603050405020304" pitchFamily="18" charset="0"/>
+              </a:rPr>
+              <a:t>marks</a:t>
+            </a:r>
+            <a:r>
+              <a:rPr lang="en-US" spc="-10" dirty="0">
+                <a:effectLst/>
+                <a:latin typeface="Times New Roman" panose="02020603050405020304" pitchFamily="18" charset="0"/>
+                <a:ea typeface="Times New Roman" panose="02020603050405020304" pitchFamily="18" charset="0"/>
+              </a:rPr>
+              <a:t>]</a:t>
+            </a:r>
+            <a:endParaRPr lang="en-MY" dirty="0">
+              <a:effectLst/>
+              <a:latin typeface="Times New Roman" panose="02020603050405020304" pitchFamily="18" charset="0"/>
+              <a:ea typeface="Times New Roman" panose="02020603050405020304" pitchFamily="18" charset="0"/>
+            </a:endParaRPr>
+          </a:p>
+        </p:txBody>
+      </p:sp>
+      <p:pic>
+        <p:nvPicPr>
+          <p:cNvPr id="13" name="Picture 12">
+            <a:extLst>
+              <a:ext uri="{FF2B5EF4-FFF2-40B4-BE49-F238E27FC236}">
+                <a16:creationId xmlns:a16="http://schemas.microsoft.com/office/drawing/2014/main" id="{9249F183-C7F7-BA21-0A76-18060E46C081}"/>
+              </a:ext>
+            </a:extLst>
+          </p:cNvPr>
+          <p:cNvPicPr>
+            <a:picLocks noChangeAspect="1"/>
+          </p:cNvPicPr>
+          <p:nvPr/>
+        </p:nvPicPr>
+        <p:blipFill>
+          <a:blip r:embed="rId4"/>
+          <a:stretch>
+            <a:fillRect/>
+          </a:stretch>
+        </p:blipFill>
+        <p:spPr>
+          <a:xfrm>
+            <a:off x="6839267" y="5468087"/>
+            <a:ext cx="3019846" cy="1162212"/>
+          </a:xfrm>
+          <a:prstGeom prst="rect">
+            <a:avLst/>
+          </a:prstGeom>
+        </p:spPr>
+      </p:pic>
+    </p:spTree>
+    <p:extLst>
+      <p:ext uri="{BB962C8B-B14F-4D97-AF65-F5344CB8AC3E}">
+        <p14:creationId xmlns:p14="http://schemas.microsoft.com/office/powerpoint/2010/main" val="719793120"/>
+      </p:ext>
+    </p:extLst>
+  </p:cSld>
+  <p:clrMapOvr>
+    <a:masterClrMapping/>
+  </p:clrMapOvr>
+</p:sld>
+</file>
+
+<file path=ppt/slides/slide8.xml><?xml version="1.0" encoding="utf-8"?>
+<p:sld xmlns:a="http://schemas.openxmlformats.org/drawingml/2006/main" xmlns:r="http://schemas.openxmlformats.org/officeDocument/2006/relationships" xmlns:p="http://schemas.openxmlformats.org/presentationml/2006/main">
+  <p:cSld>
+    <p:spTree>
+      <p:nvGrpSpPr>
+        <p:cNvPr id="1" name=""/>
+        <p:cNvGrpSpPr/>
+        <p:nvPr/>
+      </p:nvGrpSpPr>
+      <p:grpSpPr>
+        <a:xfrm>
+          <a:off x="0" y="0"/>
+          <a:ext cx="0" cy="0"/>
+          <a:chOff x="0" y="0"/>
+          <a:chExt cx="0" cy="0"/>
+        </a:xfrm>
+      </p:grpSpPr>
+      <p:sp>
+        <p:nvSpPr>
+          <p:cNvPr id="3" name="TextBox 2">
+            <a:extLst>
+              <a:ext uri="{FF2B5EF4-FFF2-40B4-BE49-F238E27FC236}">
+                <a16:creationId xmlns:a16="http://schemas.microsoft.com/office/drawing/2014/main" id="{D8944466-7474-A80E-DFD0-5903CD65ECDC}"/>
+              </a:ext>
+            </a:extLst>
+          </p:cNvPr>
+          <p:cNvSpPr txBox="1"/>
+          <p:nvPr/>
+        </p:nvSpPr>
+        <p:spPr>
+          <a:xfrm>
+            <a:off x="682387" y="455010"/>
+            <a:ext cx="10604311" cy="2031325"/>
+          </a:xfrm>
+          <a:prstGeom prst="rect">
+            <a:avLst/>
+          </a:prstGeom>
+          <a:noFill/>
+        </p:spPr>
+        <p:txBody>
+          <a:bodyPr wrap="square">
+            <a:spAutoFit/>
+          </a:bodyPr>
+          <a:lstStyle/>
+          <a:p>
+            <a:pPr>
+              <a:buNone/>
+            </a:pPr>
+            <a:r>
+              <a:rPr lang="en-MY" sz="1800" b="1" dirty="0">
+                <a:solidFill>
+                  <a:srgbClr val="000000"/>
+                </a:solidFill>
+                <a:effectLst/>
+                <a:latin typeface="Times New Roman" panose="02020603050405020304" pitchFamily="18" charset="0"/>
+                <a:ea typeface="Aptos" panose="020B0004020202020204" pitchFamily="34" charset="0"/>
+              </a:rPr>
+              <a:t>2</a:t>
+            </a:r>
+            <a:r>
+              <a:rPr lang="en-MY" sz="1800" dirty="0">
+                <a:solidFill>
+                  <a:srgbClr val="000000"/>
+                </a:solidFill>
+                <a:effectLst/>
+                <a:latin typeface="Times New Roman" panose="02020603050405020304" pitchFamily="18" charset="0"/>
+                <a:ea typeface="Aptos" panose="020B0004020202020204" pitchFamily="34" charset="0"/>
+              </a:rPr>
+              <a:t> (a) A parallel plate air-filled capacitor whose capacitance, C is 250 x 10</a:t>
+            </a:r>
+            <a:r>
+              <a:rPr lang="en-MY" sz="1800" baseline="30000" dirty="0">
+                <a:solidFill>
+                  <a:srgbClr val="000000"/>
+                </a:solidFill>
+                <a:effectLst/>
+                <a:latin typeface="Times New Roman" panose="02020603050405020304" pitchFamily="18" charset="0"/>
+                <a:ea typeface="Aptos" panose="020B0004020202020204" pitchFamily="34" charset="0"/>
+              </a:rPr>
+              <a:t>-12</a:t>
+            </a:r>
+            <a:r>
+              <a:rPr lang="en-MY" sz="1800" dirty="0">
+                <a:solidFill>
+                  <a:srgbClr val="000000"/>
+                </a:solidFill>
+                <a:effectLst/>
+                <a:latin typeface="Times New Roman" panose="02020603050405020304" pitchFamily="18" charset="0"/>
+                <a:ea typeface="Aptos" panose="020B0004020202020204" pitchFamily="34" charset="0"/>
+              </a:rPr>
+              <a:t> F is charged by a battery to a potential difference of 12 V between the two plates. Then the fully charged capacitor is disconnected and a porcelain slab with dielectric constant 3.2 is inserted between the plates. Calculate </a:t>
+            </a:r>
+            <a:endParaRPr lang="en-MY" sz="2000" dirty="0">
+              <a:solidFill>
+                <a:srgbClr val="000000"/>
+              </a:solidFill>
+              <a:effectLst/>
+              <a:latin typeface="Times New Roman" panose="02020603050405020304" pitchFamily="18" charset="0"/>
+              <a:ea typeface="Aptos" panose="020B0004020202020204" pitchFamily="34" charset="0"/>
+            </a:endParaRPr>
+          </a:p>
+          <a:p>
+            <a:pPr marL="342900" lvl="0" indent="-342900">
+              <a:buFont typeface="+mj-lt"/>
+              <a:buAutoNum type="romanLcPeriod"/>
+            </a:pPr>
+            <a:r>
+              <a:rPr lang="en-MY" sz="1800" dirty="0">
+                <a:solidFill>
+                  <a:srgbClr val="000000"/>
+                </a:solidFill>
+                <a:effectLst/>
+                <a:latin typeface="Times New Roman" panose="02020603050405020304" pitchFamily="18" charset="0"/>
+                <a:ea typeface="Aptos" panose="020B0004020202020204" pitchFamily="34" charset="0"/>
+              </a:rPr>
+              <a:t>the capacitance of the capacitor after the slab is inserted. </a:t>
+            </a:r>
+            <a:endParaRPr lang="en-MY" sz="2000" dirty="0">
+              <a:solidFill>
+                <a:srgbClr val="000000"/>
+              </a:solidFill>
+              <a:effectLst/>
+              <a:latin typeface="Times New Roman" panose="02020603050405020304" pitchFamily="18" charset="0"/>
+              <a:ea typeface="Aptos" panose="020B0004020202020204" pitchFamily="34" charset="0"/>
+            </a:endParaRPr>
+          </a:p>
+          <a:p>
+            <a:pPr marL="342900" lvl="0" indent="-342900">
+              <a:buFont typeface="+mj-lt"/>
+              <a:buAutoNum type="romanLcPeriod"/>
+            </a:pPr>
+            <a:r>
+              <a:rPr lang="en-MY" sz="1800" dirty="0">
+                <a:solidFill>
+                  <a:srgbClr val="000000"/>
+                </a:solidFill>
+                <a:effectLst/>
+                <a:latin typeface="Times New Roman" panose="02020603050405020304" pitchFamily="18" charset="0"/>
+                <a:ea typeface="Aptos" panose="020B0004020202020204" pitchFamily="34" charset="0"/>
+              </a:rPr>
+              <a:t>the energy stored in the capacitor after the slab is inserted.  </a:t>
+            </a:r>
+            <a:endParaRPr lang="en-MY" sz="2000" dirty="0">
+              <a:solidFill>
+                <a:srgbClr val="000000"/>
+              </a:solidFill>
+              <a:effectLst/>
+              <a:latin typeface="Times New Roman" panose="02020603050405020304" pitchFamily="18" charset="0"/>
+              <a:ea typeface="Aptos" panose="020B0004020202020204" pitchFamily="34" charset="0"/>
+            </a:endParaRPr>
+          </a:p>
+          <a:p>
+            <a:pPr marL="342900" lvl="0" indent="-342900">
+              <a:buFont typeface="+mj-lt"/>
+              <a:buAutoNum type="romanLcPeriod"/>
+            </a:pPr>
+            <a:r>
+              <a:rPr lang="en-MY" sz="1800" dirty="0">
+                <a:solidFill>
+                  <a:srgbClr val="000000"/>
+                </a:solidFill>
+                <a:effectLst/>
+                <a:latin typeface="Times New Roman" panose="02020603050405020304" pitchFamily="18" charset="0"/>
+                <a:ea typeface="Aptos" panose="020B0004020202020204" pitchFamily="34" charset="0"/>
+              </a:rPr>
+              <a:t>Calculate the new potential difference if after the dielectric is inserted between the plates 												[5 marks] </a:t>
+            </a:r>
+            <a:endParaRPr lang="en-MY" sz="2000" dirty="0">
+              <a:solidFill>
+                <a:srgbClr val="000000"/>
+              </a:solidFill>
+              <a:effectLst/>
+              <a:latin typeface="Times New Roman" panose="02020603050405020304" pitchFamily="18" charset="0"/>
+              <a:ea typeface="Aptos" panose="020B0004020202020204" pitchFamily="34" charset="0"/>
+            </a:endParaRPr>
+          </a:p>
+        </p:txBody>
+      </p:sp>
+      <p:sp>
+        <p:nvSpPr>
+          <p:cNvPr id="5" name="TextBox 4">
+            <a:extLst>
+              <a:ext uri="{FF2B5EF4-FFF2-40B4-BE49-F238E27FC236}">
+                <a16:creationId xmlns:a16="http://schemas.microsoft.com/office/drawing/2014/main" id="{03406126-206C-72A5-D035-ED55932E4289}"/>
+              </a:ext>
+            </a:extLst>
+          </p:cNvPr>
+          <p:cNvSpPr txBox="1"/>
+          <p:nvPr/>
+        </p:nvSpPr>
+        <p:spPr>
+          <a:xfrm>
+            <a:off x="682386" y="2536448"/>
+            <a:ext cx="10385947" cy="954107"/>
+          </a:xfrm>
+          <a:prstGeom prst="rect">
+            <a:avLst/>
+          </a:prstGeom>
+          <a:noFill/>
+        </p:spPr>
+        <p:txBody>
+          <a:bodyPr wrap="square">
+            <a:spAutoFit/>
+          </a:bodyPr>
+          <a:lstStyle/>
+          <a:p>
+            <a:pPr>
+              <a:buNone/>
+            </a:pPr>
+            <a:r>
+              <a:rPr lang="en-MY" sz="1800" dirty="0">
+                <a:solidFill>
+                  <a:srgbClr val="000000"/>
+                </a:solidFill>
+                <a:effectLst/>
+                <a:latin typeface="Times New Roman" panose="02020603050405020304" pitchFamily="18" charset="0"/>
+                <a:ea typeface="Aptos" panose="020B0004020202020204" pitchFamily="34" charset="0"/>
+              </a:rPr>
+              <a:t>(b) A </a:t>
+            </a:r>
+            <a:r>
+              <a:rPr lang="en-MY" sz="1800" b="1" dirty="0">
+                <a:solidFill>
+                  <a:srgbClr val="000000"/>
+                </a:solidFill>
+                <a:effectLst/>
+                <a:latin typeface="Times New Roman" panose="02020603050405020304" pitchFamily="18" charset="0"/>
+                <a:ea typeface="Aptos" panose="020B0004020202020204" pitchFamily="34" charset="0"/>
+              </a:rPr>
+              <a:t>12 V battery</a:t>
+            </a:r>
+            <a:r>
+              <a:rPr lang="en-MY" sz="1800" dirty="0">
+                <a:solidFill>
+                  <a:srgbClr val="000000"/>
+                </a:solidFill>
+                <a:effectLst/>
+                <a:latin typeface="Times New Roman" panose="02020603050405020304" pitchFamily="18" charset="0"/>
+                <a:ea typeface="Aptos" panose="020B0004020202020204" pitchFamily="34" charset="0"/>
+              </a:rPr>
+              <a:t> is connected to a 4 </a:t>
+            </a:r>
+            <a:r>
+              <a:rPr lang="en-MY" sz="1800" dirty="0" err="1">
+                <a:solidFill>
+                  <a:srgbClr val="000000"/>
+                </a:solidFill>
+                <a:effectLst/>
+                <a:latin typeface="Times New Roman" panose="02020603050405020304" pitchFamily="18" charset="0"/>
+                <a:ea typeface="Aptos" panose="020B0004020202020204" pitchFamily="34" charset="0"/>
+              </a:rPr>
+              <a:t>μF</a:t>
+            </a:r>
+            <a:r>
+              <a:rPr lang="en-MY" sz="1800" dirty="0">
+                <a:solidFill>
+                  <a:srgbClr val="000000"/>
+                </a:solidFill>
+                <a:effectLst/>
+                <a:latin typeface="Times New Roman" panose="02020603050405020304" pitchFamily="18" charset="0"/>
+                <a:ea typeface="Aptos" panose="020B0004020202020204" pitchFamily="34" charset="0"/>
+              </a:rPr>
+              <a:t> capacitor and a 20 Ω resistor. Calculate the charge in the capacitor at        time t = 90 </a:t>
+            </a:r>
+            <a:r>
+              <a:rPr lang="en-MY" sz="1800" dirty="0" err="1">
+                <a:solidFill>
+                  <a:srgbClr val="000000"/>
+                </a:solidFill>
+                <a:effectLst/>
+                <a:latin typeface="Times New Roman" panose="02020603050405020304" pitchFamily="18" charset="0"/>
+                <a:ea typeface="Aptos" panose="020B0004020202020204" pitchFamily="34" charset="0"/>
+              </a:rPr>
+              <a:t>μs</a:t>
+            </a:r>
+            <a:r>
+              <a:rPr lang="en-MY" sz="1800" dirty="0">
+                <a:solidFill>
+                  <a:srgbClr val="000000"/>
+                </a:solidFill>
+                <a:effectLst/>
+                <a:latin typeface="Times New Roman" panose="02020603050405020304" pitchFamily="18" charset="0"/>
+                <a:ea typeface="Aptos" panose="020B0004020202020204" pitchFamily="34" charset="0"/>
+              </a:rPr>
+              <a:t>. 									[2 marks]</a:t>
+            </a:r>
+            <a:br>
+              <a:rPr lang="en-MY" sz="1800" dirty="0">
+                <a:solidFill>
+                  <a:srgbClr val="000000"/>
+                </a:solidFill>
+                <a:effectLst/>
+                <a:latin typeface="Times New Roman" panose="02020603050405020304" pitchFamily="18" charset="0"/>
+                <a:ea typeface="Aptos" panose="020B0004020202020204" pitchFamily="34" charset="0"/>
+              </a:rPr>
+            </a:br>
+            <a:endParaRPr lang="en-MY" sz="2000" dirty="0">
+              <a:solidFill>
+                <a:srgbClr val="000000"/>
+              </a:solidFill>
+              <a:effectLst/>
+              <a:latin typeface="Times New Roman" panose="02020603050405020304" pitchFamily="18" charset="0"/>
+              <a:ea typeface="Aptos" panose="020B0004020202020204" pitchFamily="34" charset="0"/>
+            </a:endParaRPr>
+          </a:p>
+        </p:txBody>
+      </p:sp>
+      <p:pic>
+        <p:nvPicPr>
+          <p:cNvPr id="11" name="Picture 10">
+            <a:extLst>
+              <a:ext uri="{FF2B5EF4-FFF2-40B4-BE49-F238E27FC236}">
+                <a16:creationId xmlns:a16="http://schemas.microsoft.com/office/drawing/2014/main" id="{4F5C23E5-7534-29C6-4A0E-23AEC4BAE4F3}"/>
+              </a:ext>
+            </a:extLst>
+          </p:cNvPr>
+          <p:cNvPicPr>
+            <a:picLocks noChangeAspect="1"/>
+          </p:cNvPicPr>
+          <p:nvPr/>
+        </p:nvPicPr>
+        <p:blipFill>
+          <a:blip r:embed="rId2"/>
+          <a:stretch>
+            <a:fillRect/>
+          </a:stretch>
+        </p:blipFill>
+        <p:spPr>
+          <a:xfrm>
+            <a:off x="9030447" y="5431619"/>
+            <a:ext cx="2705478" cy="952633"/>
+          </a:xfrm>
+          <a:prstGeom prst="rect">
+            <a:avLst/>
+          </a:prstGeom>
+        </p:spPr>
+      </p:pic>
+    </p:spTree>
+    <p:extLst>
+      <p:ext uri="{BB962C8B-B14F-4D97-AF65-F5344CB8AC3E}">
+        <p14:creationId xmlns:p14="http://schemas.microsoft.com/office/powerpoint/2010/main" val="2268944023"/>
+      </p:ext>
+    </p:extLst>
+  </p:cSld>
+  <p:clrMapOvr>
+    <a:masterClrMapping/>
+  </p:clrMapOvr>
+</p:sld>
+</file>
+
+<file path=ppt/slides/slide9.xml><?xml version="1.0" encoding="utf-8"?>
+<p:sld xmlns:a="http://schemas.openxmlformats.org/drawingml/2006/main" xmlns:r="http://schemas.openxmlformats.org/officeDocument/2006/relationships" xmlns:p="http://schemas.openxmlformats.org/presentationml/2006/main">
+  <p:cSld>
+    <p:spTree>
+      <p:nvGrpSpPr>
+        <p:cNvPr id="1" name=""/>
+        <p:cNvGrpSpPr/>
+        <p:nvPr/>
+      </p:nvGrpSpPr>
+      <p:grpSpPr>
+        <a:xfrm>
+          <a:off x="0" y="0"/>
+          <a:ext cx="0" cy="0"/>
+          <a:chOff x="0" y="0"/>
+          <a:chExt cx="0" cy="0"/>
+        </a:xfrm>
+      </p:grpSpPr>
+      <p:pic>
+        <p:nvPicPr>
+          <p:cNvPr id="3" name="Picture 2">
+            <a:extLst>
+              <a:ext uri="{FF2B5EF4-FFF2-40B4-BE49-F238E27FC236}">
+                <a16:creationId xmlns:a16="http://schemas.microsoft.com/office/drawing/2014/main" id="{FBC480DB-88A4-06F0-FB34-DDE703E1E1D1}"/>
+              </a:ext>
+            </a:extLst>
+          </p:cNvPr>
+          <p:cNvPicPr>
+            <a:picLocks noChangeAspect="1"/>
+          </p:cNvPicPr>
+          <p:nvPr/>
+        </p:nvPicPr>
+        <p:blipFill>
+          <a:blip r:embed="rId2"/>
+          <a:stretch>
+            <a:fillRect/>
+          </a:stretch>
+        </p:blipFill>
+        <p:spPr>
+          <a:xfrm>
+            <a:off x="425701" y="316614"/>
+            <a:ext cx="4467849" cy="2419688"/>
+          </a:xfrm>
+          <a:prstGeom prst="rect">
+            <a:avLst/>
+          </a:prstGeom>
+        </p:spPr>
+      </p:pic>
+      <p:sp>
+        <p:nvSpPr>
+          <p:cNvPr id="7" name="TextBox 6">
+            <a:extLst>
+              <a:ext uri="{FF2B5EF4-FFF2-40B4-BE49-F238E27FC236}">
+                <a16:creationId xmlns:a16="http://schemas.microsoft.com/office/drawing/2014/main" id="{D167A598-CB6D-361A-69DA-0552F8D16042}"/>
+              </a:ext>
+            </a:extLst>
+          </p:cNvPr>
+          <p:cNvSpPr txBox="1"/>
+          <p:nvPr/>
+        </p:nvSpPr>
+        <p:spPr>
+          <a:xfrm>
+            <a:off x="3565423" y="330874"/>
+            <a:ext cx="8041558" cy="915828"/>
+          </a:xfrm>
+          <a:prstGeom prst="rect">
+            <a:avLst/>
+          </a:prstGeom>
+          <a:noFill/>
+        </p:spPr>
+        <p:txBody>
+          <a:bodyPr wrap="square">
+            <a:spAutoFit/>
+          </a:bodyPr>
+          <a:lstStyle/>
+          <a:p>
+            <a:pPr marL="950595" marR="631190">
+              <a:lnSpc>
+                <a:spcPct val="101000"/>
+              </a:lnSpc>
+              <a:spcBef>
+                <a:spcPts val="380"/>
+              </a:spcBef>
+              <a:buNone/>
+            </a:pPr>
+            <a:r>
+              <a:rPr lang="ms-MY" sz="1800" b="1" dirty="0">
+                <a:effectLst/>
+                <a:latin typeface="Times New Roman" panose="02020603050405020304" pitchFamily="18" charset="0"/>
+                <a:ea typeface="Times New Roman" panose="02020603050405020304" pitchFamily="18" charset="0"/>
+              </a:rPr>
+              <a:t>2(a) FIGURE</a:t>
+            </a:r>
+            <a:r>
+              <a:rPr lang="ms-MY" sz="1800" b="1" spc="-30" dirty="0">
+                <a:effectLst/>
+                <a:latin typeface="Times New Roman" panose="02020603050405020304" pitchFamily="18" charset="0"/>
+                <a:ea typeface="Times New Roman" panose="02020603050405020304" pitchFamily="18" charset="0"/>
+              </a:rPr>
+              <a:t> </a:t>
+            </a:r>
+            <a:r>
+              <a:rPr lang="ms-MY" sz="1800" b="1" dirty="0">
+                <a:effectLst/>
+                <a:latin typeface="Times New Roman" panose="02020603050405020304" pitchFamily="18" charset="0"/>
+                <a:ea typeface="Times New Roman" panose="02020603050405020304" pitchFamily="18" charset="0"/>
+              </a:rPr>
+              <a:t>2</a:t>
+            </a:r>
+            <a:r>
+              <a:rPr lang="ms-MY" sz="1800" b="1" spc="-30" dirty="0">
+                <a:effectLst/>
+                <a:latin typeface="Times New Roman" panose="02020603050405020304" pitchFamily="18" charset="0"/>
+                <a:ea typeface="Times New Roman" panose="02020603050405020304" pitchFamily="18" charset="0"/>
+              </a:rPr>
+              <a:t> </a:t>
+            </a:r>
+            <a:r>
+              <a:rPr lang="ms-MY" sz="1800" dirty="0">
+                <a:effectLst/>
+                <a:latin typeface="Times New Roman" panose="02020603050405020304" pitchFamily="18" charset="0"/>
+                <a:ea typeface="Times New Roman" panose="02020603050405020304" pitchFamily="18" charset="0"/>
+              </a:rPr>
+              <a:t>shows</a:t>
+            </a:r>
+            <a:r>
+              <a:rPr lang="ms-MY" sz="1800" spc="-35" dirty="0">
+                <a:effectLst/>
+                <a:latin typeface="Times New Roman" panose="02020603050405020304" pitchFamily="18" charset="0"/>
+                <a:ea typeface="Times New Roman" panose="02020603050405020304" pitchFamily="18" charset="0"/>
+              </a:rPr>
+              <a:t> </a:t>
+            </a:r>
+            <a:r>
+              <a:rPr lang="ms-MY" sz="1800" dirty="0">
+                <a:effectLst/>
+                <a:latin typeface="Times New Roman" panose="02020603050405020304" pitchFamily="18" charset="0"/>
+                <a:ea typeface="Times New Roman" panose="02020603050405020304" pitchFamily="18" charset="0"/>
+              </a:rPr>
+              <a:t>a</a:t>
+            </a:r>
+            <a:r>
+              <a:rPr lang="ms-MY" sz="1800" spc="-20" dirty="0">
+                <a:effectLst/>
+                <a:latin typeface="Times New Roman" panose="02020603050405020304" pitchFamily="18" charset="0"/>
+                <a:ea typeface="Times New Roman" panose="02020603050405020304" pitchFamily="18" charset="0"/>
+              </a:rPr>
+              <a:t> </a:t>
+            </a:r>
+            <a:r>
+              <a:rPr lang="ms-MY" sz="1800" dirty="0">
+                <a:effectLst/>
+                <a:latin typeface="Times New Roman" panose="02020603050405020304" pitchFamily="18" charset="0"/>
+                <a:ea typeface="Times New Roman" panose="02020603050405020304" pitchFamily="18" charset="0"/>
+              </a:rPr>
+              <a:t>variation</a:t>
+            </a:r>
+            <a:r>
+              <a:rPr lang="ms-MY" sz="1800" spc="-25" dirty="0">
+                <a:effectLst/>
+                <a:latin typeface="Times New Roman" panose="02020603050405020304" pitchFamily="18" charset="0"/>
+                <a:ea typeface="Times New Roman" panose="02020603050405020304" pitchFamily="18" charset="0"/>
+              </a:rPr>
+              <a:t> </a:t>
+            </a:r>
+            <a:r>
+              <a:rPr lang="ms-MY" sz="1800" dirty="0">
+                <a:effectLst/>
+                <a:latin typeface="Times New Roman" panose="02020603050405020304" pitchFamily="18" charset="0"/>
+                <a:ea typeface="Times New Roman" panose="02020603050405020304" pitchFamily="18" charset="0"/>
+              </a:rPr>
+              <a:t>of</a:t>
+            </a:r>
+            <a:r>
+              <a:rPr lang="ms-MY" sz="1800" spc="-30" dirty="0">
+                <a:effectLst/>
+                <a:latin typeface="Times New Roman" panose="02020603050405020304" pitchFamily="18" charset="0"/>
+                <a:ea typeface="Times New Roman" panose="02020603050405020304" pitchFamily="18" charset="0"/>
+              </a:rPr>
+              <a:t> </a:t>
+            </a:r>
+            <a:r>
+              <a:rPr lang="ms-MY" sz="1800" dirty="0">
+                <a:effectLst/>
+                <a:latin typeface="Times New Roman" panose="02020603050405020304" pitchFamily="18" charset="0"/>
+                <a:ea typeface="Times New Roman" panose="02020603050405020304" pitchFamily="18" charset="0"/>
+              </a:rPr>
+              <a:t>charge</a:t>
+            </a:r>
+            <a:r>
+              <a:rPr lang="ms-MY" sz="1800" spc="-35" dirty="0">
+                <a:effectLst/>
+                <a:latin typeface="Times New Roman" panose="02020603050405020304" pitchFamily="18" charset="0"/>
+                <a:ea typeface="Times New Roman" panose="02020603050405020304" pitchFamily="18" charset="0"/>
+              </a:rPr>
+              <a:t> </a:t>
+            </a:r>
+            <a:r>
+              <a:rPr lang="ms-MY" sz="1800" dirty="0">
+                <a:effectLst/>
+                <a:latin typeface="Times New Roman" panose="02020603050405020304" pitchFamily="18" charset="0"/>
+                <a:ea typeface="Times New Roman" panose="02020603050405020304" pitchFamily="18" charset="0"/>
+              </a:rPr>
+              <a:t>with</a:t>
+            </a:r>
+            <a:r>
+              <a:rPr lang="ms-MY" sz="1800" spc="-35" dirty="0">
+                <a:effectLst/>
+                <a:latin typeface="Times New Roman" panose="02020603050405020304" pitchFamily="18" charset="0"/>
+                <a:ea typeface="Times New Roman" panose="02020603050405020304" pitchFamily="18" charset="0"/>
+              </a:rPr>
+              <a:t> </a:t>
+            </a:r>
+            <a:r>
+              <a:rPr lang="ms-MY" sz="1800" dirty="0">
+                <a:effectLst/>
+                <a:latin typeface="Times New Roman" panose="02020603050405020304" pitchFamily="18" charset="0"/>
+                <a:ea typeface="Times New Roman" panose="02020603050405020304" pitchFamily="18" charset="0"/>
+              </a:rPr>
+              <a:t>time</a:t>
+            </a:r>
+            <a:r>
+              <a:rPr lang="ms-MY" sz="1800" spc="-35" dirty="0">
+                <a:effectLst/>
+                <a:latin typeface="Times New Roman" panose="02020603050405020304" pitchFamily="18" charset="0"/>
+                <a:ea typeface="Times New Roman" panose="02020603050405020304" pitchFamily="18" charset="0"/>
+              </a:rPr>
+              <a:t> </a:t>
+            </a:r>
+            <a:r>
+              <a:rPr lang="ms-MY" sz="1800" dirty="0">
+                <a:effectLst/>
+                <a:latin typeface="Times New Roman" panose="02020603050405020304" pitchFamily="18" charset="0"/>
+                <a:ea typeface="Times New Roman" panose="02020603050405020304" pitchFamily="18" charset="0"/>
+              </a:rPr>
+              <a:t>in</a:t>
+            </a:r>
+            <a:r>
+              <a:rPr lang="ms-MY" sz="1800" spc="-35" dirty="0">
+                <a:effectLst/>
+                <a:latin typeface="Times New Roman" panose="02020603050405020304" pitchFamily="18" charset="0"/>
+                <a:ea typeface="Times New Roman" panose="02020603050405020304" pitchFamily="18" charset="0"/>
+              </a:rPr>
+              <a:t> </a:t>
+            </a:r>
+            <a:r>
+              <a:rPr lang="ms-MY" sz="1800" dirty="0">
+                <a:effectLst/>
+                <a:latin typeface="Times New Roman" panose="02020603050405020304" pitchFamily="18" charset="0"/>
+                <a:ea typeface="Times New Roman" panose="02020603050405020304" pitchFamily="18" charset="0"/>
+              </a:rPr>
+              <a:t>a</a:t>
+            </a:r>
+            <a:r>
+              <a:rPr lang="ms-MY" sz="1800" spc="-35" dirty="0">
+                <a:effectLst/>
+                <a:latin typeface="Times New Roman" panose="02020603050405020304" pitchFamily="18" charset="0"/>
+                <a:ea typeface="Times New Roman" panose="02020603050405020304" pitchFamily="18" charset="0"/>
+              </a:rPr>
+              <a:t> </a:t>
+            </a:r>
+            <a:r>
+              <a:rPr lang="ms-MY" sz="1800" dirty="0">
+                <a:effectLst/>
+                <a:latin typeface="Times New Roman" panose="02020603050405020304" pitchFamily="18" charset="0"/>
+                <a:ea typeface="Times New Roman" panose="02020603050405020304" pitchFamily="18" charset="0"/>
+              </a:rPr>
+              <a:t>circuit</a:t>
+            </a:r>
+            <a:r>
+              <a:rPr lang="ms-MY" sz="1800" spc="-20" dirty="0">
+                <a:effectLst/>
+                <a:latin typeface="Times New Roman" panose="02020603050405020304" pitchFamily="18" charset="0"/>
+                <a:ea typeface="Times New Roman" panose="02020603050405020304" pitchFamily="18" charset="0"/>
+              </a:rPr>
+              <a:t> </a:t>
+            </a:r>
+            <a:r>
+              <a:rPr lang="ms-MY" sz="1800" dirty="0">
+                <a:effectLst/>
+                <a:latin typeface="Times New Roman" panose="02020603050405020304" pitchFamily="18" charset="0"/>
+                <a:ea typeface="Times New Roman" panose="02020603050405020304" pitchFamily="18" charset="0"/>
+              </a:rPr>
+              <a:t>during</a:t>
+            </a:r>
+            <a:r>
+              <a:rPr lang="ms-MY" sz="1800" spc="-25" dirty="0">
+                <a:effectLst/>
+                <a:latin typeface="Times New Roman" panose="02020603050405020304" pitchFamily="18" charset="0"/>
+                <a:ea typeface="Times New Roman" panose="02020603050405020304" pitchFamily="18" charset="0"/>
+              </a:rPr>
+              <a:t> </a:t>
+            </a:r>
+            <a:r>
+              <a:rPr lang="ms-MY" sz="1800" dirty="0">
+                <a:effectLst/>
+                <a:latin typeface="Times New Roman" panose="02020603050405020304" pitchFamily="18" charset="0"/>
+                <a:ea typeface="Times New Roman" panose="02020603050405020304" pitchFamily="18" charset="0"/>
+              </a:rPr>
+              <a:t>discharging</a:t>
+            </a:r>
+            <a:r>
+              <a:rPr lang="ms-MY" sz="1800" spc="-35" dirty="0">
+                <a:effectLst/>
+                <a:latin typeface="Times New Roman" panose="02020603050405020304" pitchFamily="18" charset="0"/>
+                <a:ea typeface="Times New Roman" panose="02020603050405020304" pitchFamily="18" charset="0"/>
+              </a:rPr>
+              <a:t> </a:t>
+            </a:r>
+            <a:r>
+              <a:rPr lang="ms-MY" sz="1800" dirty="0">
+                <a:effectLst/>
+                <a:latin typeface="Times New Roman" panose="02020603050405020304" pitchFamily="18" charset="0"/>
+                <a:ea typeface="Times New Roman" panose="02020603050405020304" pitchFamily="18" charset="0"/>
+              </a:rPr>
+              <a:t>process of a capacitor through a resistor of 10 MΩ. Calculate the</a:t>
+            </a:r>
+            <a:endParaRPr lang="en-MY" sz="1800" dirty="0">
+              <a:effectLst/>
+              <a:latin typeface="Times New Roman" panose="02020603050405020304" pitchFamily="18" charset="0"/>
+              <a:ea typeface="Times New Roman" panose="02020603050405020304" pitchFamily="18" charset="0"/>
+            </a:endParaRPr>
+          </a:p>
+        </p:txBody>
+      </p:sp>
+      <p:sp>
+        <p:nvSpPr>
+          <p:cNvPr id="9" name="TextBox 8">
+            <a:extLst>
+              <a:ext uri="{FF2B5EF4-FFF2-40B4-BE49-F238E27FC236}">
+                <a16:creationId xmlns:a16="http://schemas.microsoft.com/office/drawing/2014/main" id="{9EB446E1-9C19-47BE-8EDB-88CB0637B87B}"/>
+              </a:ext>
+            </a:extLst>
+          </p:cNvPr>
+          <p:cNvSpPr txBox="1"/>
+          <p:nvPr/>
+        </p:nvSpPr>
+        <p:spPr>
+          <a:xfrm>
+            <a:off x="4052118" y="1268226"/>
+            <a:ext cx="7908824" cy="723275"/>
+          </a:xfrm>
+          <a:prstGeom prst="rect">
+            <a:avLst/>
+          </a:prstGeom>
+          <a:noFill/>
+        </p:spPr>
+        <p:txBody>
+          <a:bodyPr wrap="square">
+            <a:spAutoFit/>
+          </a:bodyPr>
+          <a:lstStyle/>
+          <a:p>
+            <a:pPr marL="742950" lvl="1" indent="-285750">
+              <a:spcBef>
+                <a:spcPts val="550"/>
+              </a:spcBef>
+              <a:buSzPts val="1200"/>
+              <a:buFont typeface="Times New Roman" panose="02020603050405020304" pitchFamily="18" charset="0"/>
+              <a:buAutoNum type="romanLcParenBoth"/>
+              <a:tabLst>
+                <a:tab pos="1316355" algn="l"/>
+              </a:tabLst>
+            </a:pPr>
+            <a:r>
+              <a:rPr lang="ms-MY" spc="0" dirty="0">
+                <a:effectLst/>
+                <a:latin typeface="Times New Roman" panose="02020603050405020304" pitchFamily="18" charset="0"/>
+                <a:ea typeface="Times New Roman" panose="02020603050405020304" pitchFamily="18" charset="0"/>
+              </a:rPr>
+              <a:t>time </a:t>
+            </a:r>
+            <a:r>
+              <a:rPr lang="ms-MY" spc="-10" dirty="0">
+                <a:effectLst/>
+                <a:latin typeface="Times New Roman" panose="02020603050405020304" pitchFamily="18" charset="0"/>
+                <a:ea typeface="Times New Roman" panose="02020603050405020304" pitchFamily="18" charset="0"/>
+              </a:rPr>
+              <a:t>constant.				</a:t>
+            </a:r>
+            <a:r>
+              <a:rPr lang="ms-MY" dirty="0"/>
+              <a:t>[3 </a:t>
+            </a:r>
+            <a:r>
+              <a:rPr lang="ms-MY" i="1" dirty="0"/>
+              <a:t>marks</a:t>
+            </a:r>
+            <a:r>
+              <a:rPr lang="ms-MY" dirty="0"/>
+              <a:t>]</a:t>
+            </a:r>
+            <a:r>
+              <a:rPr lang="ms-MY" spc="-10" dirty="0">
+                <a:effectLst/>
+                <a:latin typeface="Times New Roman" panose="02020603050405020304" pitchFamily="18" charset="0"/>
+                <a:ea typeface="Times New Roman" panose="02020603050405020304" pitchFamily="18" charset="0"/>
+              </a:rPr>
+              <a:t>	</a:t>
+            </a:r>
+            <a:endParaRPr lang="en-MY" spc="0" dirty="0">
+              <a:effectLst/>
+              <a:latin typeface="Times New Roman" panose="02020603050405020304" pitchFamily="18" charset="0"/>
+              <a:ea typeface="Times New Roman" panose="02020603050405020304" pitchFamily="18" charset="0"/>
+            </a:endParaRPr>
+          </a:p>
+          <a:p>
+            <a:pPr marL="742950" lvl="1" indent="-285750">
+              <a:spcBef>
+                <a:spcPts val="600"/>
+              </a:spcBef>
+              <a:buSzPts val="1200"/>
+              <a:buFont typeface="Times New Roman" panose="02020603050405020304" pitchFamily="18" charset="0"/>
+              <a:buAutoNum type="romanLcParenBoth"/>
+              <a:tabLst>
+                <a:tab pos="1316355" algn="l"/>
+              </a:tabLst>
+            </a:pPr>
+            <a:r>
+              <a:rPr lang="ms-MY" spc="0" dirty="0">
+                <a:effectLst/>
+                <a:latin typeface="Times New Roman" panose="02020603050405020304" pitchFamily="18" charset="0"/>
+                <a:ea typeface="Times New Roman" panose="02020603050405020304" pitchFamily="18" charset="0"/>
+              </a:rPr>
+              <a:t>capacitance</a:t>
+            </a:r>
+            <a:r>
+              <a:rPr lang="ms-MY" spc="-10" dirty="0">
+                <a:effectLst/>
+                <a:latin typeface="Times New Roman" panose="02020603050405020304" pitchFamily="18" charset="0"/>
+                <a:ea typeface="Times New Roman" panose="02020603050405020304" pitchFamily="18" charset="0"/>
+              </a:rPr>
+              <a:t> </a:t>
+            </a:r>
+            <a:r>
+              <a:rPr lang="ms-MY" spc="0" dirty="0">
+                <a:effectLst/>
+                <a:latin typeface="Times New Roman" panose="02020603050405020304" pitchFamily="18" charset="0"/>
+                <a:ea typeface="Times New Roman" panose="02020603050405020304" pitchFamily="18" charset="0"/>
+              </a:rPr>
+              <a:t>of</a:t>
+            </a:r>
+            <a:r>
+              <a:rPr lang="ms-MY" spc="-5" dirty="0">
+                <a:effectLst/>
+                <a:latin typeface="Times New Roman" panose="02020603050405020304" pitchFamily="18" charset="0"/>
+                <a:ea typeface="Times New Roman" panose="02020603050405020304" pitchFamily="18" charset="0"/>
+              </a:rPr>
+              <a:t> </a:t>
+            </a:r>
+            <a:r>
+              <a:rPr lang="ms-MY" spc="0" dirty="0">
+                <a:effectLst/>
+                <a:latin typeface="Times New Roman" panose="02020603050405020304" pitchFamily="18" charset="0"/>
+                <a:ea typeface="Times New Roman" panose="02020603050405020304" pitchFamily="18" charset="0"/>
+              </a:rPr>
+              <a:t>the</a:t>
+            </a:r>
+            <a:r>
+              <a:rPr lang="ms-MY" spc="-10" dirty="0">
+                <a:effectLst/>
+                <a:latin typeface="Times New Roman" panose="02020603050405020304" pitchFamily="18" charset="0"/>
+                <a:ea typeface="Times New Roman" panose="02020603050405020304" pitchFamily="18" charset="0"/>
+              </a:rPr>
+              <a:t> capacitor.			</a:t>
+            </a:r>
+            <a:r>
+              <a:rPr lang="ms-MY" dirty="0"/>
+              <a:t>[2 </a:t>
+            </a:r>
+            <a:r>
+              <a:rPr lang="ms-MY" i="1" dirty="0"/>
+              <a:t>marks</a:t>
+            </a:r>
+            <a:r>
+              <a:rPr lang="ms-MY" dirty="0"/>
+              <a:t>]</a:t>
+            </a:r>
+            <a:endParaRPr lang="en-MY" spc="0" dirty="0">
+              <a:effectLst/>
+              <a:latin typeface="Times New Roman" panose="02020603050405020304" pitchFamily="18" charset="0"/>
+              <a:ea typeface="Times New Roman" panose="02020603050405020304" pitchFamily="18" charset="0"/>
+            </a:endParaRPr>
+          </a:p>
+        </p:txBody>
+      </p:sp>
+      <p:sp>
+        <p:nvSpPr>
+          <p:cNvPr id="11" name="TextBox 10">
+            <a:extLst>
+              <a:ext uri="{FF2B5EF4-FFF2-40B4-BE49-F238E27FC236}">
+                <a16:creationId xmlns:a16="http://schemas.microsoft.com/office/drawing/2014/main" id="{70CBA0F9-AF34-CAFB-4D86-D99F8C53105D}"/>
+              </a:ext>
+            </a:extLst>
+          </p:cNvPr>
+          <p:cNvSpPr txBox="1"/>
+          <p:nvPr/>
+        </p:nvSpPr>
+        <p:spPr>
+          <a:xfrm>
+            <a:off x="3550673" y="2551837"/>
+            <a:ext cx="8911713" cy="923330"/>
+          </a:xfrm>
+          <a:prstGeom prst="rect">
+            <a:avLst/>
+          </a:prstGeom>
+          <a:noFill/>
+        </p:spPr>
+        <p:txBody>
+          <a:bodyPr wrap="square">
+            <a:spAutoFit/>
+          </a:bodyPr>
+          <a:lstStyle/>
+          <a:p>
+            <a:pPr marL="950595" marR="631190" indent="-300355">
+              <a:spcBef>
+                <a:spcPts val="1040"/>
+              </a:spcBef>
+              <a:buNone/>
+              <a:tabLst>
+                <a:tab pos="950595" algn="l"/>
+              </a:tabLst>
+            </a:pPr>
+            <a:r>
+              <a:rPr lang="ms-MY" sz="1600" spc="-20" dirty="0">
+                <a:effectLst/>
+                <a:latin typeface="Times New Roman" panose="02020603050405020304" pitchFamily="18" charset="0"/>
+                <a:ea typeface="Times New Roman" panose="02020603050405020304" pitchFamily="18" charset="0"/>
+              </a:rPr>
+              <a:t>(b)</a:t>
+            </a:r>
+            <a:r>
+              <a:rPr lang="ms-MY" sz="1600" dirty="0">
+                <a:effectLst/>
+                <a:latin typeface="Times New Roman" panose="02020603050405020304" pitchFamily="18" charset="0"/>
+                <a:ea typeface="Times New Roman" panose="02020603050405020304" pitchFamily="18" charset="0"/>
+              </a:rPr>
+              <a:t>	</a:t>
+            </a:r>
+            <a:r>
+              <a:rPr lang="ms-MY" sz="1800" dirty="0">
+                <a:effectLst/>
+                <a:latin typeface="Times New Roman" panose="02020603050405020304" pitchFamily="18" charset="0"/>
+                <a:ea typeface="Times New Roman" panose="02020603050405020304" pitchFamily="18" charset="0"/>
+              </a:rPr>
+              <a:t>An</a:t>
+            </a:r>
+            <a:r>
+              <a:rPr lang="ms-MY" sz="1800" spc="195" dirty="0">
+                <a:effectLst/>
+                <a:latin typeface="Times New Roman" panose="02020603050405020304" pitchFamily="18" charset="0"/>
+                <a:ea typeface="Times New Roman" panose="02020603050405020304" pitchFamily="18" charset="0"/>
+              </a:rPr>
+              <a:t> </a:t>
+            </a:r>
+            <a:r>
+              <a:rPr lang="ms-MY" sz="1800" dirty="0">
+                <a:effectLst/>
+                <a:latin typeface="Times New Roman" panose="02020603050405020304" pitchFamily="18" charset="0"/>
+                <a:ea typeface="Times New Roman" panose="02020603050405020304" pitchFamily="18" charset="0"/>
+              </a:rPr>
+              <a:t>air-filled</a:t>
+            </a:r>
+            <a:r>
+              <a:rPr lang="ms-MY" sz="1800" spc="195" dirty="0">
+                <a:effectLst/>
+                <a:latin typeface="Times New Roman" panose="02020603050405020304" pitchFamily="18" charset="0"/>
+                <a:ea typeface="Times New Roman" panose="02020603050405020304" pitchFamily="18" charset="0"/>
+              </a:rPr>
+              <a:t> </a:t>
+            </a:r>
+            <a:r>
+              <a:rPr lang="ms-MY" sz="1800" dirty="0">
+                <a:effectLst/>
+                <a:latin typeface="Times New Roman" panose="02020603050405020304" pitchFamily="18" charset="0"/>
+                <a:ea typeface="Times New Roman" panose="02020603050405020304" pitchFamily="18" charset="0"/>
+              </a:rPr>
+              <a:t>parallel</a:t>
+            </a:r>
+            <a:r>
+              <a:rPr lang="ms-MY" sz="1800" spc="200" dirty="0">
+                <a:effectLst/>
+                <a:latin typeface="Times New Roman" panose="02020603050405020304" pitchFamily="18" charset="0"/>
+                <a:ea typeface="Times New Roman" panose="02020603050405020304" pitchFamily="18" charset="0"/>
+              </a:rPr>
+              <a:t> </a:t>
+            </a:r>
+            <a:r>
+              <a:rPr lang="ms-MY" sz="1800" dirty="0">
+                <a:effectLst/>
+                <a:latin typeface="Times New Roman" panose="02020603050405020304" pitchFamily="18" charset="0"/>
+                <a:ea typeface="Times New Roman" panose="02020603050405020304" pitchFamily="18" charset="0"/>
+              </a:rPr>
+              <a:t>plate</a:t>
+            </a:r>
+            <a:r>
+              <a:rPr lang="ms-MY" sz="1800" spc="195" dirty="0">
+                <a:effectLst/>
+                <a:latin typeface="Times New Roman" panose="02020603050405020304" pitchFamily="18" charset="0"/>
+                <a:ea typeface="Times New Roman" panose="02020603050405020304" pitchFamily="18" charset="0"/>
+              </a:rPr>
+              <a:t> </a:t>
+            </a:r>
+            <a:r>
+              <a:rPr lang="ms-MY" sz="1800" dirty="0">
+                <a:effectLst/>
+                <a:latin typeface="Times New Roman" panose="02020603050405020304" pitchFamily="18" charset="0"/>
+                <a:ea typeface="Times New Roman" panose="02020603050405020304" pitchFamily="18" charset="0"/>
+              </a:rPr>
+              <a:t>capacitor</a:t>
+            </a:r>
+            <a:r>
+              <a:rPr lang="ms-MY" sz="1800" spc="195" dirty="0">
+                <a:effectLst/>
+                <a:latin typeface="Times New Roman" panose="02020603050405020304" pitchFamily="18" charset="0"/>
+                <a:ea typeface="Times New Roman" panose="02020603050405020304" pitchFamily="18" charset="0"/>
+              </a:rPr>
+              <a:t> </a:t>
+            </a:r>
+            <a:r>
+              <a:rPr lang="ms-MY" sz="1800" dirty="0">
+                <a:effectLst/>
+                <a:latin typeface="Times New Roman" panose="02020603050405020304" pitchFamily="18" charset="0"/>
+                <a:ea typeface="Times New Roman" panose="02020603050405020304" pitchFamily="18" charset="0"/>
+              </a:rPr>
+              <a:t>has</a:t>
+            </a:r>
+            <a:r>
+              <a:rPr lang="ms-MY" sz="1800" spc="200" dirty="0">
+                <a:effectLst/>
+                <a:latin typeface="Times New Roman" panose="02020603050405020304" pitchFamily="18" charset="0"/>
+                <a:ea typeface="Times New Roman" panose="02020603050405020304" pitchFamily="18" charset="0"/>
+              </a:rPr>
+              <a:t> </a:t>
+            </a:r>
+            <a:r>
+              <a:rPr lang="ms-MY" sz="1800" dirty="0">
+                <a:effectLst/>
+                <a:latin typeface="Times New Roman" panose="02020603050405020304" pitchFamily="18" charset="0"/>
+                <a:ea typeface="Times New Roman" panose="02020603050405020304" pitchFamily="18" charset="0"/>
+              </a:rPr>
+              <a:t>a</a:t>
+            </a:r>
+            <a:r>
+              <a:rPr lang="ms-MY" sz="1800" spc="195" dirty="0">
+                <a:effectLst/>
+                <a:latin typeface="Times New Roman" panose="02020603050405020304" pitchFamily="18" charset="0"/>
+                <a:ea typeface="Times New Roman" panose="02020603050405020304" pitchFamily="18" charset="0"/>
+              </a:rPr>
+              <a:t> </a:t>
+            </a:r>
+            <a:r>
+              <a:rPr lang="ms-MY" sz="1800" dirty="0">
+                <a:effectLst/>
+                <a:latin typeface="Times New Roman" panose="02020603050405020304" pitchFamily="18" charset="0"/>
+                <a:ea typeface="Times New Roman" panose="02020603050405020304" pitchFamily="18" charset="0"/>
+              </a:rPr>
+              <a:t>capacitance</a:t>
+            </a:r>
+            <a:r>
+              <a:rPr lang="ms-MY" sz="1800" spc="195" dirty="0">
+                <a:effectLst/>
+                <a:latin typeface="Times New Roman" panose="02020603050405020304" pitchFamily="18" charset="0"/>
+                <a:ea typeface="Times New Roman" panose="02020603050405020304" pitchFamily="18" charset="0"/>
+              </a:rPr>
+              <a:t> </a:t>
+            </a:r>
+            <a:r>
+              <a:rPr lang="ms-MY" sz="1800" dirty="0">
+                <a:effectLst/>
+                <a:latin typeface="Times New Roman" panose="02020603050405020304" pitchFamily="18" charset="0"/>
+                <a:ea typeface="Times New Roman" panose="02020603050405020304" pitchFamily="18" charset="0"/>
+              </a:rPr>
+              <a:t>of</a:t>
+            </a:r>
+            <a:r>
+              <a:rPr lang="ms-MY" sz="1800" spc="195" dirty="0">
+                <a:effectLst/>
+                <a:latin typeface="Times New Roman" panose="02020603050405020304" pitchFamily="18" charset="0"/>
+                <a:ea typeface="Times New Roman" panose="02020603050405020304" pitchFamily="18" charset="0"/>
+              </a:rPr>
+              <a:t> </a:t>
+            </a:r>
+            <a:r>
+              <a:rPr lang="ms-MY" sz="1800" dirty="0">
+                <a:effectLst/>
+                <a:latin typeface="Times New Roman" panose="02020603050405020304" pitchFamily="18" charset="0"/>
+                <a:ea typeface="Times New Roman" panose="02020603050405020304" pitchFamily="18" charset="0"/>
+              </a:rPr>
+              <a:t>5.5</a:t>
+            </a:r>
+            <a:r>
+              <a:rPr lang="ms-MY" sz="1800" spc="195" dirty="0">
+                <a:effectLst/>
+                <a:latin typeface="Times New Roman" panose="02020603050405020304" pitchFamily="18" charset="0"/>
+                <a:ea typeface="Times New Roman" panose="02020603050405020304" pitchFamily="18" charset="0"/>
+              </a:rPr>
+              <a:t> </a:t>
+            </a:r>
+            <a:r>
+              <a:rPr lang="ms-MY" sz="1800" dirty="0">
+                <a:effectLst/>
+                <a:latin typeface="Times New Roman" panose="02020603050405020304" pitchFamily="18" charset="0"/>
+                <a:ea typeface="Times New Roman" panose="02020603050405020304" pitchFamily="18" charset="0"/>
+              </a:rPr>
+              <a:t>μF.</a:t>
+            </a:r>
+            <a:r>
+              <a:rPr lang="ms-MY" sz="1800" spc="195" dirty="0">
+                <a:effectLst/>
+                <a:latin typeface="Times New Roman" panose="02020603050405020304" pitchFamily="18" charset="0"/>
+                <a:ea typeface="Times New Roman" panose="02020603050405020304" pitchFamily="18" charset="0"/>
+              </a:rPr>
+              <a:t> </a:t>
+            </a:r>
+            <a:r>
+              <a:rPr lang="ms-MY" sz="1800" dirty="0">
+                <a:effectLst/>
+                <a:latin typeface="Times New Roman" panose="02020603050405020304" pitchFamily="18" charset="0"/>
+                <a:ea typeface="Times New Roman" panose="02020603050405020304" pitchFamily="18" charset="0"/>
+              </a:rPr>
+              <a:t>Calculate</a:t>
+            </a:r>
+            <a:r>
+              <a:rPr lang="ms-MY" sz="1800" spc="195" dirty="0">
+                <a:effectLst/>
+                <a:latin typeface="Times New Roman" panose="02020603050405020304" pitchFamily="18" charset="0"/>
+                <a:ea typeface="Times New Roman" panose="02020603050405020304" pitchFamily="18" charset="0"/>
+              </a:rPr>
+              <a:t> </a:t>
+            </a:r>
+            <a:r>
+              <a:rPr lang="ms-MY" sz="1800" dirty="0">
+                <a:effectLst/>
+                <a:latin typeface="Times New Roman" panose="02020603050405020304" pitchFamily="18" charset="0"/>
+                <a:ea typeface="Times New Roman" panose="02020603050405020304" pitchFamily="18" charset="0"/>
+              </a:rPr>
+              <a:t>the capacitance</a:t>
+            </a:r>
+            <a:r>
+              <a:rPr lang="ms-MY" sz="1800" spc="-35" dirty="0">
+                <a:effectLst/>
+                <a:latin typeface="Times New Roman" panose="02020603050405020304" pitchFamily="18" charset="0"/>
+                <a:ea typeface="Times New Roman" panose="02020603050405020304" pitchFamily="18" charset="0"/>
+              </a:rPr>
+              <a:t> </a:t>
+            </a:r>
+            <a:r>
+              <a:rPr lang="ms-MY" sz="1800" dirty="0">
+                <a:effectLst/>
+                <a:latin typeface="Times New Roman" panose="02020603050405020304" pitchFamily="18" charset="0"/>
+                <a:ea typeface="Times New Roman" panose="02020603050405020304" pitchFamily="18" charset="0"/>
+              </a:rPr>
+              <a:t>when</a:t>
+            </a:r>
+            <a:r>
+              <a:rPr lang="ms-MY" sz="1800" spc="-20" dirty="0">
+                <a:effectLst/>
+                <a:latin typeface="Times New Roman" panose="02020603050405020304" pitchFamily="18" charset="0"/>
+                <a:ea typeface="Times New Roman" panose="02020603050405020304" pitchFamily="18" charset="0"/>
+              </a:rPr>
+              <a:t> </a:t>
+            </a:r>
+            <a:r>
+              <a:rPr lang="ms-MY" sz="1800" dirty="0">
+                <a:effectLst/>
+                <a:latin typeface="Times New Roman" panose="02020603050405020304" pitchFamily="18" charset="0"/>
+                <a:ea typeface="Times New Roman" panose="02020603050405020304" pitchFamily="18" charset="0"/>
+              </a:rPr>
+              <a:t>a</a:t>
+            </a:r>
+            <a:r>
+              <a:rPr lang="ms-MY" sz="1800" spc="-25" dirty="0">
+                <a:effectLst/>
+                <a:latin typeface="Times New Roman" panose="02020603050405020304" pitchFamily="18" charset="0"/>
+                <a:ea typeface="Times New Roman" panose="02020603050405020304" pitchFamily="18" charset="0"/>
+              </a:rPr>
+              <a:t> </a:t>
+            </a:r>
+            <a:r>
+              <a:rPr lang="ms-MY" sz="1800" dirty="0">
+                <a:effectLst/>
+                <a:latin typeface="Times New Roman" panose="02020603050405020304" pitchFamily="18" charset="0"/>
+                <a:ea typeface="Times New Roman" panose="02020603050405020304" pitchFamily="18" charset="0"/>
+              </a:rPr>
+              <a:t>dielectric</a:t>
+            </a:r>
+            <a:r>
+              <a:rPr lang="ms-MY" sz="1800" spc="-30" dirty="0">
+                <a:effectLst/>
+                <a:latin typeface="Times New Roman" panose="02020603050405020304" pitchFamily="18" charset="0"/>
+                <a:ea typeface="Times New Roman" panose="02020603050405020304" pitchFamily="18" charset="0"/>
+              </a:rPr>
+              <a:t> </a:t>
+            </a:r>
+            <a:r>
+              <a:rPr lang="ms-MY" sz="1800" dirty="0">
+                <a:effectLst/>
+                <a:latin typeface="Times New Roman" panose="02020603050405020304" pitchFamily="18" charset="0"/>
+                <a:ea typeface="Times New Roman" panose="02020603050405020304" pitchFamily="18" charset="0"/>
+              </a:rPr>
+              <a:t>material</a:t>
+            </a:r>
+            <a:r>
+              <a:rPr lang="ms-MY" sz="1800" spc="-30" dirty="0">
+                <a:effectLst/>
+                <a:latin typeface="Times New Roman" panose="02020603050405020304" pitchFamily="18" charset="0"/>
+                <a:ea typeface="Times New Roman" panose="02020603050405020304" pitchFamily="18" charset="0"/>
+              </a:rPr>
+              <a:t> </a:t>
+            </a:r>
+            <a:r>
+              <a:rPr lang="ms-MY" sz="1800" dirty="0">
+                <a:effectLst/>
+                <a:latin typeface="Times New Roman" panose="02020603050405020304" pitchFamily="18" charset="0"/>
+                <a:ea typeface="Times New Roman" panose="02020603050405020304" pitchFamily="18" charset="0"/>
+              </a:rPr>
+              <a:t>with</a:t>
+            </a:r>
+            <a:r>
+              <a:rPr lang="ms-MY" sz="1800" spc="-30" dirty="0">
+                <a:effectLst/>
+                <a:latin typeface="Times New Roman" panose="02020603050405020304" pitchFamily="18" charset="0"/>
+                <a:ea typeface="Times New Roman" panose="02020603050405020304" pitchFamily="18" charset="0"/>
+              </a:rPr>
+              <a:t> </a:t>
+            </a:r>
+            <a:r>
+              <a:rPr lang="ms-MY" sz="1800" dirty="0">
+                <a:effectLst/>
+                <a:latin typeface="Times New Roman" panose="02020603050405020304" pitchFamily="18" charset="0"/>
+                <a:ea typeface="Times New Roman" panose="02020603050405020304" pitchFamily="18" charset="0"/>
+              </a:rPr>
+              <a:t>dielectric</a:t>
+            </a:r>
+            <a:r>
+              <a:rPr lang="ms-MY" sz="1800" spc="-35" dirty="0">
+                <a:effectLst/>
+                <a:latin typeface="Times New Roman" panose="02020603050405020304" pitchFamily="18" charset="0"/>
+                <a:ea typeface="Times New Roman" panose="02020603050405020304" pitchFamily="18" charset="0"/>
+              </a:rPr>
+              <a:t> </a:t>
+            </a:r>
+            <a:r>
+              <a:rPr lang="ms-MY" sz="1800" dirty="0">
+                <a:effectLst/>
+                <a:latin typeface="Times New Roman" panose="02020603050405020304" pitchFamily="18" charset="0"/>
+                <a:ea typeface="Times New Roman" panose="02020603050405020304" pitchFamily="18" charset="0"/>
+              </a:rPr>
+              <a:t>constant</a:t>
+            </a:r>
+            <a:r>
+              <a:rPr lang="ms-MY" sz="1800" spc="-15" dirty="0">
+                <a:effectLst/>
+                <a:latin typeface="Times New Roman" panose="02020603050405020304" pitchFamily="18" charset="0"/>
+                <a:ea typeface="Times New Roman" panose="02020603050405020304" pitchFamily="18" charset="0"/>
+              </a:rPr>
+              <a:t> </a:t>
+            </a:r>
+            <a:r>
+              <a:rPr lang="ms-MY" sz="1800" dirty="0">
+                <a:effectLst/>
+                <a:latin typeface="Times New Roman" panose="02020603050405020304" pitchFamily="18" charset="0"/>
+                <a:ea typeface="Times New Roman" panose="02020603050405020304" pitchFamily="18" charset="0"/>
+              </a:rPr>
+              <a:t>3</a:t>
+            </a:r>
+            <a:r>
+              <a:rPr lang="ms-MY" sz="1800" spc="-30" dirty="0">
+                <a:effectLst/>
+                <a:latin typeface="Times New Roman" panose="02020603050405020304" pitchFamily="18" charset="0"/>
+                <a:ea typeface="Times New Roman" panose="02020603050405020304" pitchFamily="18" charset="0"/>
+              </a:rPr>
+              <a:t> </a:t>
+            </a:r>
+            <a:r>
+              <a:rPr lang="ms-MY" sz="1800" dirty="0">
+                <a:effectLst/>
+                <a:latin typeface="Times New Roman" panose="02020603050405020304" pitchFamily="18" charset="0"/>
+                <a:ea typeface="Times New Roman" panose="02020603050405020304" pitchFamily="18" charset="0"/>
+              </a:rPr>
+              <a:t>is</a:t>
+            </a:r>
+            <a:r>
+              <a:rPr lang="ms-MY" sz="1800" spc="-30" dirty="0">
+                <a:effectLst/>
+                <a:latin typeface="Times New Roman" panose="02020603050405020304" pitchFamily="18" charset="0"/>
+                <a:ea typeface="Times New Roman" panose="02020603050405020304" pitchFamily="18" charset="0"/>
+              </a:rPr>
+              <a:t> </a:t>
+            </a:r>
+            <a:r>
+              <a:rPr lang="ms-MY" sz="1800" dirty="0">
+                <a:effectLst/>
+                <a:latin typeface="Times New Roman" panose="02020603050405020304" pitchFamily="18" charset="0"/>
+                <a:ea typeface="Times New Roman" panose="02020603050405020304" pitchFamily="18" charset="0"/>
+              </a:rPr>
+              <a:t>inserted</a:t>
+            </a:r>
+            <a:r>
+              <a:rPr lang="ms-MY" sz="1800" spc="-15" dirty="0">
+                <a:effectLst/>
+                <a:latin typeface="Times New Roman" panose="02020603050405020304" pitchFamily="18" charset="0"/>
+                <a:ea typeface="Times New Roman" panose="02020603050405020304" pitchFamily="18" charset="0"/>
+              </a:rPr>
+              <a:t> </a:t>
+            </a:r>
+            <a:r>
+              <a:rPr lang="ms-MY" sz="1800" spc="-10" dirty="0">
+                <a:effectLst/>
+                <a:latin typeface="Times New Roman" panose="02020603050405020304" pitchFamily="18" charset="0"/>
+                <a:ea typeface="Times New Roman" panose="02020603050405020304" pitchFamily="18" charset="0"/>
+              </a:rPr>
+              <a:t>between </a:t>
+            </a:r>
+            <a:r>
+              <a:rPr lang="ms-MY" sz="1800" dirty="0">
+                <a:effectLst/>
+                <a:latin typeface="Times New Roman" panose="02020603050405020304" pitchFamily="18" charset="0"/>
+                <a:ea typeface="Times New Roman" panose="02020603050405020304" pitchFamily="18" charset="0"/>
+              </a:rPr>
+              <a:t>the </a:t>
+            </a:r>
+            <a:r>
+              <a:rPr lang="ms-MY" sz="1800" spc="-10" dirty="0">
+                <a:effectLst/>
+                <a:latin typeface="Times New Roman" panose="02020603050405020304" pitchFamily="18" charset="0"/>
+                <a:ea typeface="Times New Roman" panose="02020603050405020304" pitchFamily="18" charset="0"/>
+              </a:rPr>
+              <a:t>plates.					</a:t>
+            </a:r>
+            <a:r>
+              <a:rPr lang="ms-MY" dirty="0"/>
+              <a:t> [2 </a:t>
+            </a:r>
+            <a:r>
+              <a:rPr lang="ms-MY" i="1" dirty="0"/>
+              <a:t>marks</a:t>
+            </a:r>
+            <a:r>
+              <a:rPr lang="ms-MY" dirty="0"/>
+              <a:t>]</a:t>
+            </a:r>
+            <a:endParaRPr lang="en-MY" sz="1800" dirty="0">
+              <a:effectLst/>
+              <a:latin typeface="Times New Roman" panose="02020603050405020304" pitchFamily="18" charset="0"/>
+              <a:ea typeface="Times New Roman" panose="02020603050405020304" pitchFamily="18" charset="0"/>
+            </a:endParaRPr>
+          </a:p>
+        </p:txBody>
+      </p:sp>
+      <p:pic>
+        <p:nvPicPr>
+          <p:cNvPr id="13" name="Picture 12">
+            <a:extLst>
+              <a:ext uri="{FF2B5EF4-FFF2-40B4-BE49-F238E27FC236}">
+                <a16:creationId xmlns:a16="http://schemas.microsoft.com/office/drawing/2014/main" id="{815D8C94-94CF-19EB-E7B3-DAC3970E1E58}"/>
+              </a:ext>
+            </a:extLst>
+          </p:cNvPr>
+          <p:cNvPicPr>
+            <a:picLocks noChangeAspect="1"/>
+          </p:cNvPicPr>
+          <p:nvPr/>
+        </p:nvPicPr>
+        <p:blipFill>
+          <a:blip r:embed="rId3"/>
+          <a:stretch>
+            <a:fillRect/>
+          </a:stretch>
+        </p:blipFill>
+        <p:spPr>
+          <a:xfrm>
+            <a:off x="9153101" y="5589774"/>
+            <a:ext cx="3038899" cy="752580"/>
+          </a:xfrm>
+          <a:prstGeom prst="rect">
+            <a:avLst/>
+          </a:prstGeom>
+        </p:spPr>
+      </p:pic>
+    </p:spTree>
+    <p:extLst>
+      <p:ext uri="{BB962C8B-B14F-4D97-AF65-F5344CB8AC3E}">
+        <p14:creationId xmlns:p14="http://schemas.microsoft.com/office/powerpoint/2010/main" val="2041140048"/>
       </p:ext>
     </p:extLst>
   </p:cSld>
